--- a/presentation/EpiGrade_slides.pptx
+++ b/presentation/EpiGrade_slides.pptx
@@ -21,9 +21,10 @@
     <p:sldId id="269" r:id="rId15"/>
     <p:sldId id="270" r:id="rId16"/>
     <p:sldId id="271" r:id="rId17"/>
+    <p:sldId id="272" r:id="rId18"/>
   </p:sldIdLst>
   <p:notesMasterIdLst>
-    <p:notesMasterId r:id="rId18"/>
+    <p:notesMasterId r:id="rId19"/>
   </p:notesMasterIdLst>
   <p:sldSz cx="12192000" cy="6858000"/>
   <p:notesSz cx="6858000" cy="12192000"/>
@@ -122,7 +123,7 @@
   <p:extLst>
     <p:ext uri="{521415D9-36F7-43E2-AB2F-B90AF26B5E84}">
       <p14:sectionLst xmlns:p14="http://schemas.microsoft.com/office/powerpoint/2010/main">
-        <p14:section name="The problem" id="{3a4d46ea-a37b-9787-87ac-f9c8f2c08467}">
+        <p14:section name="The problem" id="{7537a7fa-7ad4-d722-e206-b2e5450fd9eb}">
           <p14:sldIdLst>
             <p14:sldId id="256"/>
             <p14:sldId id="257"/>
@@ -130,36 +131,37 @@
             <p14:sldId id="259"/>
           </p14:sldIdLst>
         </p14:section>
-        <p14:section name="What we built" id="{127fe7a3-390d-43eb-7cb5-b73bf29c263b}">
+        <p14:section name="What we built" id="{904a8bb3-f2db-7946-ec8b-b4c1ad6152bb}">
           <p14:sldIdLst>
             <p14:sldId id="260"/>
             <p14:sldId id="261"/>
             <p14:sldId id="262"/>
           </p14:sldIdLst>
         </p14:section>
-        <p14:section name="Findings" id="{6a1da79b-8530-9864-3a2b-affdb298c5a9}">
+        <p14:section name="Findings" id="{96729480-2a5c-9ed3-6dbf-2930f62f9dba}">
           <p14:sldIdLst>
             <p14:sldId id="263"/>
             <p14:sldId id="264"/>
             <p14:sldId id="265"/>
+            <p14:sldId id="266"/>
           </p14:sldIdLst>
         </p14:section>
-        <p14:section name="Identification engine" id="{f0133613-a88a-cc0e-1d81-c7c64e498469}">
+        <p14:section name="Identification engine" id="{96405a75-17e8-0e4d-cc9b-9d4a768ffb94}">
           <p14:sldIdLst>
-            <p14:sldId id="266"/>
             <p14:sldId id="267"/>
+            <p14:sldId id="268"/>
           </p14:sldIdLst>
         </p14:section>
-        <p14:section name="Honest accounting" id="{4f538463-5158-1890-97ba-3992e082dc18}">
+        <p14:section name="Honest accounting" id="{993c2f5e-3d36-6672-848c-514542a758a2}">
           <p14:sldIdLst>
-            <p14:sldId id="268"/>
             <p14:sldId id="269"/>
+            <p14:sldId id="270"/>
           </p14:sldIdLst>
         </p14:section>
-        <p14:section name="Close" id="{be38c1c4-47f6-6513-18f3-21968a6c497f}">
+        <p14:section name="Close" id="{baa2b1e0-de7e-dcaa-30b9-c7c94e3d31ec}">
           <p14:sldIdLst>
-            <p14:sldId id="270"/>
             <p14:sldId id="271"/>
+            <p14:sldId id="272"/>
           </p14:sldIdLst>
         </p14:section>
       </p14:sectionLst>
@@ -169,6 +171,429 @@
     </p:ext>
   </p:extLst>
 </p:presentation>
+</file>
+
+<file path=ppt/charts/chart1.xml><?xml version="1.0" encoding="utf-8"?>
+<c:chartSpace xmlns:c="http://schemas.openxmlformats.org/drawingml/2006/chart" xmlns:a="http://schemas.openxmlformats.org/drawingml/2006/main" xmlns:r="http://schemas.openxmlformats.org/officeDocument/2006/relationships">
+  <c:date1904 val="0"/>
+  <c:roundedCorners val="1"/>
+  <c:chart>
+    <c:title>
+      <c:tx>
+        <c:rich>
+          <a:bodyPr/>
+          <a:lstStyle/>
+          <a:p>
+            <a:pPr>
+              <a:defRPr sz="1600" b="0" i="0" u="none" strike="noStrike">
+                <a:solidFill>
+                  <a:srgbClr val="14213D"/>
+                </a:solidFill>
+                <a:latin typeface="+mn-lt"/>
+              </a:defRPr>
+            </a:pPr>
+            <a:r>
+              <a:rPr sz="1600" b="0" i="0" u="none" strike="noStrike">
+                <a:solidFill>
+                  <a:srgbClr val="14213D"/>
+                </a:solidFill>
+                <a:latin typeface="+mn-lt"/>
+              </a:rPr>
+              <a:t>Other disorders' cases flagged, by classifier</a:t>
+            </a:r>
+          </a:p>
+        </c:rich>
+      </c:tx>
+      <c:layout/>
+      <c:overlay val="0"/>
+    </c:title>
+    <c:autoTitleDeleted val="0"/>
+    <c:plotArea>
+      <c:layout/>
+      <c:barChart>
+        <c:barDir val="bar"/>
+        <c:grouping val="clustered"/>
+        <c:varyColors val="0"/>
+        <c:ser>
+          <c:idx val="0"/>
+          <c:order val="0"/>
+          <c:tx>
+            <c:strRef>
+              <c:f>Sheet1!$B$1</c:f>
+              <c:strCache>
+                <c:ptCount val="1"/>
+                <c:pt idx="0">
+                  <c:v>Mean fraction of other disorders' cases flagged</c:v>
+                </c:pt>
+              </c:strCache>
+            </c:strRef>
+          </c:tx>
+          <c:spPr>
+            <a:solidFill>
+              <a:srgbClr val="2A78D6"/>
+            </a:solidFill>
+            <a:effectLst/>
+          </c:spPr>
+          <c:invertIfNegative val="0"/>
+          <c:dLbls>
+            <c:numFmt formatCode="0%" sourceLinked="0"/>
+            <c:txPr>
+              <a:bodyPr/>
+              <a:lstStyle/>
+              <a:p>
+                <a:pPr>
+                  <a:defRPr b="0" i="0" strike="noStrike" sz="1400" u="none">
+                    <a:solidFill>
+                      <a:srgbClr val="14213D"/>
+                    </a:solidFill>
+                    <a:latin typeface="+mn-lt"/>
+                  </a:defRPr>
+                </a:pPr>
+              </a:p>
+            </c:txPr>
+            <c:showLegendKey val="0"/>
+            <c:showVal val="1"/>
+            <c:showCatName val="0"/>
+            <c:showSerName val="0"/>
+            <c:showPercent val="0"/>
+            <c:showBubbleSize val="0"/>
+            <c:showLeaderLines val="0"/>
+          </c:dLbls>
+          <c:dPt>
+            <c:idx val="0"/>
+            <c:invertIfNegative val="0"/>
+            <c:bubble3D val="0"/>
+            <c:spPr>
+              <a:solidFill>
+                <a:srgbClr val="2A78D6"/>
+              </a:solidFill>
+              <a:effectLst/>
+            </c:spPr>
+          </c:dPt>
+          <c:dPt>
+            <c:idx val="1"/>
+            <c:invertIfNegative val="0"/>
+            <c:bubble3D val="0"/>
+            <c:spPr>
+              <a:solidFill>
+                <a:srgbClr val="2A78D6"/>
+              </a:solidFill>
+              <a:effectLst/>
+            </c:spPr>
+          </c:dPt>
+          <c:dPt>
+            <c:idx val="2"/>
+            <c:invertIfNegative val="0"/>
+            <c:bubble3D val="0"/>
+            <c:spPr>
+              <a:solidFill>
+                <a:srgbClr val="2A78D6"/>
+              </a:solidFill>
+              <a:effectLst/>
+            </c:spPr>
+          </c:dPt>
+          <c:dPt>
+            <c:idx val="3"/>
+            <c:invertIfNegative val="0"/>
+            <c:bubble3D val="0"/>
+            <c:spPr>
+              <a:solidFill>
+                <a:srgbClr val="2A78D6"/>
+              </a:solidFill>
+              <a:effectLst/>
+            </c:spPr>
+          </c:dPt>
+          <c:dPt>
+            <c:idx val="4"/>
+            <c:invertIfNegative val="0"/>
+            <c:bubble3D val="0"/>
+            <c:spPr>
+              <a:solidFill>
+                <a:srgbClr val="2A78D6"/>
+              </a:solidFill>
+              <a:effectLst/>
+            </c:spPr>
+          </c:dPt>
+          <c:dPt>
+            <c:idx val="5"/>
+            <c:invertIfNegative val="0"/>
+            <c:bubble3D val="0"/>
+            <c:spPr>
+              <a:solidFill>
+                <a:srgbClr val="2A78D6"/>
+              </a:solidFill>
+              <a:effectLst/>
+            </c:spPr>
+          </c:dPt>
+          <c:dPt>
+            <c:idx val="6"/>
+            <c:invertIfNegative val="0"/>
+            <c:bubble3D val="0"/>
+            <c:spPr>
+              <a:solidFill>
+                <a:srgbClr val="2A78D6"/>
+              </a:solidFill>
+              <a:effectLst/>
+            </c:spPr>
+          </c:dPt>
+          <c:dPt>
+            <c:idx val="7"/>
+            <c:invertIfNegative val="0"/>
+            <c:bubble3D val="0"/>
+            <c:spPr>
+              <a:solidFill>
+                <a:srgbClr val="2A78D6"/>
+              </a:solidFill>
+              <a:effectLst/>
+            </c:spPr>
+          </c:dPt>
+          <c:dPt>
+            <c:idx val="8"/>
+            <c:invertIfNegative val="0"/>
+            <c:bubble3D val="0"/>
+            <c:spPr>
+              <a:solidFill>
+                <a:srgbClr val="EB6834"/>
+              </a:solidFill>
+              <a:effectLst/>
+            </c:spPr>
+          </c:dPt>
+          <c:dPt>
+            <c:idx val="9"/>
+            <c:invertIfNegative val="0"/>
+            <c:bubble3D val="0"/>
+            <c:spPr>
+              <a:solidFill>
+                <a:srgbClr val="EB6834"/>
+              </a:solidFill>
+              <a:effectLst/>
+            </c:spPr>
+          </c:dPt>
+          <c:cat>
+            <c:multiLvlStrRef>
+              <c:f>Sheet1!$A$2:$A$11</c:f>
+              <c:multiLvlStrCache>
+                <c:ptCount val="10"/>
+                <c:lvl>
+                  <c:pt idx="0">
+                    <c:v>Sotos</c:v>
+                  </c:pt>
+                  <c:pt idx="1">
+                    <c:v>ICF</c:v>
+                  </c:pt>
+                  <c:pt idx="2">
+                    <c:v>Kabuki</c:v>
+                  </c:pt>
+                  <c:pt idx="3">
+                    <c:v>Silver-Russell</c:v>
+                  </c:pt>
+                  <c:pt idx="4">
+                    <c:v>7q11.23 dup</c:v>
+                  </c:pt>
+                  <c:pt idx="5">
+                    <c:v>Williams</c:v>
+                  </c:pt>
+                  <c:pt idx="6">
+                    <c:v>CHARGE</c:v>
+                  </c:pt>
+                  <c:pt idx="7">
+                    <c:v>Down</c:v>
+                  </c:pt>
+                  <c:pt idx="8">
+                    <c:v>Nicolaides-Baraitser</c:v>
+                  </c:pt>
+                  <c:pt idx="9">
+                    <c:v>Coffin-Siris</c:v>
+                  </c:pt>
+                </c:lvl>
+              </c:multiLvlStrCache>
+            </c:multiLvlStrRef>
+          </c:cat>
+          <c:val>
+            <c:numRef>
+              <c:f>Sheet1!$B$2:$B$11</c:f>
+              <c:numCache>
+                <c:formatCode>General</c:formatCode>
+                <c:ptCount val="10"/>
+                <c:pt idx="0">
+                  <c:v>0</c:v>
+                </c:pt>
+                <c:pt idx="1">
+                  <c:v>0</c:v>
+                </c:pt>
+                <c:pt idx="2">
+                  <c:v>0.019666666666666666</c:v>
+                </c:pt>
+                <c:pt idx="3">
+                  <c:v>0.05366666666666667</c:v>
+                </c:pt>
+                <c:pt idx="4">
+                  <c:v>0.06244444444444445</c:v>
+                </c:pt>
+                <c:pt idx="5">
+                  <c:v>0.06433333333333333</c:v>
+                </c:pt>
+                <c:pt idx="6">
+                  <c:v>0.33122222222222225</c:v>
+                </c:pt>
+                <c:pt idx="7">
+                  <c:v>0.4224444444444445</c:v>
+                </c:pt>
+                <c:pt idx="8">
+                  <c:v>0.5974444444444444</c:v>
+                </c:pt>
+                <c:pt idx="9">
+                  <c:v>0.7637777777777779</c:v>
+                </c:pt>
+              </c:numCache>
+            </c:numRef>
+          </c:val>
+        </c:ser>
+        <c:dLbls>
+          <c:numFmt formatCode="0%" sourceLinked="0"/>
+          <c:txPr>
+            <a:bodyPr/>
+            <a:lstStyle/>
+            <a:p>
+              <a:pPr>
+                <a:defRPr b="0" i="0" strike="noStrike" sz="1400" u="none">
+                  <a:solidFill>
+                    <a:srgbClr val="14213D"/>
+                  </a:solidFill>
+                  <a:latin typeface="+mn-lt"/>
+                </a:defRPr>
+              </a:pPr>
+            </a:p>
+          </c:txPr>
+          <c:showLegendKey val="0"/>
+          <c:showVal val="1"/>
+          <c:showCatName val="0"/>
+          <c:showSerName val="0"/>
+          <c:showPercent val="0"/>
+          <c:showBubbleSize val="0"/>
+          <c:showLeaderLines val="0"/>
+        </c:dLbls>
+        <c:gapWidth val="150"/>
+        <c:overlap val="0"/>
+        <c:axId val="2094734554"/>
+        <c:axId val="2094734552"/>
+        <c:axId val="2094734556"/>
+      </c:barChart>
+      <c:catAx>
+        <c:axId val="2094734554"/>
+        <c:scaling>
+          <c:orientation val="minMax"/>
+        </c:scaling>
+        <c:delete val="0"/>
+        <c:axPos val="l"/>
+        <c:numFmt formatCode="General" sourceLinked="1"/>
+        <c:majorTickMark val="out"/>
+        <c:minorTickMark val="none"/>
+        <c:tickLblPos val="nextTo"/>
+        <c:spPr>
+          <a:ln w="12700" cap="flat">
+            <a:solidFill>
+              <a:srgbClr val="888888"/>
+            </a:solidFill>
+            <a:prstDash val="solid"/>
+            <a:round/>
+          </a:ln>
+        </c:spPr>
+        <c:txPr>
+          <a:bodyPr/>
+          <a:lstStyle/>
+          <a:p>
+            <a:pPr>
+              <a:defRPr sz="1400" b="0" i="0" u="none" strike="noStrike">
+                <a:solidFill>
+                  <a:srgbClr val="3D4A63"/>
+                </a:solidFill>
+                <a:latin typeface="+mn-lt"/>
+              </a:defRPr>
+            </a:pPr>
+            <a:endParaRPr lang="en-US"/>
+          </a:p>
+        </c:txPr>
+        <c:crossAx val="2094734552"/>
+        <c:crosses val="autoZero"/>
+        <c:auto val="1"/>
+        <c:lblAlgn val="ctr"/>
+        <c:noMultiLvlLbl val="1"/>
+      </c:catAx>
+      <c:valAx>
+        <c:axId val="2094734552"/>
+        <c:scaling>
+          <c:orientation val="minMax"/>
+          <c:max val="1"/>
+          <c:min val="0"/>
+        </c:scaling>
+        <c:delete val="0"/>
+        <c:axPos val="b"/>
+        <c:majorGridlines>
+          <c:spPr>
+            <a:ln w="9525" cap="flat">
+              <a:solidFill>
+                <a:srgbClr val="E4E3DF"/>
+              </a:solidFill>
+              <a:prstDash val="solid"/>
+              <a:round/>
+            </a:ln>
+          </c:spPr>
+        </c:majorGridlines>
+        <c:numFmt formatCode="0%" sourceLinked="0"/>
+        <c:majorTickMark val="out"/>
+        <c:minorTickMark val="none"/>
+        <c:tickLblPos val="low"/>
+        <c:spPr>
+          <a:ln w="12700" cap="flat">
+            <a:solidFill>
+              <a:srgbClr val="888888"/>
+            </a:solidFill>
+            <a:prstDash val="solid"/>
+            <a:round/>
+          </a:ln>
+        </c:spPr>
+        <c:txPr>
+          <a:bodyPr/>
+          <a:lstStyle/>
+          <a:p>
+            <a:pPr>
+              <a:defRPr sz="1200" b="0" i="0" u="none" strike="noStrike">
+                <a:solidFill>
+                  <a:srgbClr val="3D4A63"/>
+                </a:solidFill>
+                <a:latin typeface="+mn-lt"/>
+              </a:defRPr>
+            </a:pPr>
+            <a:endParaRPr lang="en-US"/>
+          </a:p>
+        </c:txPr>
+        <c:crossAx val="2094734554"/>
+        <c:crosses val="autoZero"/>
+        <c:crossBetween val="between"/>
+      </c:valAx>
+      <c:spPr>
+        <a:noFill/>
+        <a:ln>
+          <a:noFill/>
+        </a:ln>
+        <a:effectLst/>
+      </c:spPr>
+    </c:plotArea>
+    <c:plotVisOnly val="1"/>
+    <c:dispBlanksAs val="span"/>
+  </c:chart>
+  <c:spPr>
+    <a:noFill/>
+    <a:ln>
+      <a:noFill/>
+    </a:ln>
+    <a:effectLst/>
+  </c:spPr>
+  <c:externalData r:id="rId1">
+    <c:autoUpdate val="0"/>
+  </c:externalData>
+</c:chartSpace>
 </file>
 
 <file path=ppt/notesMasters/notesMaster1.xml><?xml version="1.0" encoding="utf-8"?>
@@ -654,7 +1079,7 @@
           <a:p>
             <a:r>
               <a:rPr lang="en-US" dirty="0"/>
-              <a:t>Third, we scored every classifier against every disorder and against 273 healthy controls. A good classifier lights up only its own square on the diagonal. The CHARGE syndrome classifier also flags about 38 percent of Kabuki syndrome cases. And one classifier, built using controls borrowed from a different laboratory, flags 86 percent of healthy controls. It is detecting the laboratory, not the disease, yet its own-study numbers look excellent.</a:t>
+              <a:t>Third, we scored every classifier against every disorder and against 273 healthy controls. A good classifier lights up only its own square on the diagonal. The CHARGE syndrome classifier also flags about 38 percent of Kabuki syndrome cases. Now look at the two rows outlined in orange. They light up almost everywhere. Those two classifiers were trained against controls from a different dataset, and the next slide shows what that does.</a:t>
             </a:r>
             <a:endParaRPr lang="en-US" dirty="0"/>
           </a:p>
@@ -742,7 +1167,7 @@
           <a:p>
             <a:r>
               <a:rPr lang="en-US" dirty="0"/>
-              <a:t>This is the feature our supervisor asked for. A laboratory uploads its own list of probes, and the engine searches all twelve disorders. We tested it with five signatures made from real data. The real Sotos probes identify Sotos, even when we flip every direction, which the tool flags. Five hundred random probes give no match. That last one taught us something: random probes separate Sotos cases perfectly by the usual measure, the area under the curve, so we added a comparison against random probe sets.</a:t>
+              <a:t>This is the result in one comparison. When a classifier's controls come from its own dataset, it wrongly flags about 12 percent of patients who have a different disorder. When the controls come from another dataset, it flags about 68 percent. The two orange bars are Coffin-Siris and Nicolaides-Baraitser, whose source study deposited no controls. They learned to tell two laboratories apart, not to detect a disease. We keep them in the benchmark as a warning, not as signatures. One caution: both borrowed the same controls, so this is one problem seen twice.</a:t>
             </a:r>
             <a:endParaRPr lang="en-US" dirty="0"/>
           </a:p>
@@ -830,7 +1255,7 @@
           <a:p>
             <a:r>
               <a:rPr lang="en-US" dirty="0"/>
-              <a:t>This is the page itself, and we will now show it live. You upload a probe list or choose one of the five examples. It reports how many probes exist on each array type, then the verdict, and it always says how many disorders it searched. Here it identifies Sotos syndrome and warns that the match is within a single study. The page runs offline and only ever takes probe identifiers, never patient data.</a:t>
+              <a:t>This is the feature our supervisor asked for. A laboratory uploads its own list of probes, and the engine searches all twelve disorders. We tested it with five signatures made from real data. The real Sotos probes identify Sotos, even when we flip every direction, which the tool flags. Five hundred random probes give no match. That last one is a finding about method. By the usual measure, the area under the curve or AUC, random probes score a perfect 1.0 on Williams syndrome and pass the usual threshold on seven of twelve cohorts. So AUC alone would have named a disorder for a random list. What makes the tool say no match is a second test: the probes must beat a thousand random probe sets. Also note the twenty-probe signature is capped at a lower evidence ceiling than the five-hundred-probe one.</a:t>
             </a:r>
             <a:endParaRPr lang="en-US" dirty="0"/>
           </a:p>
@@ -918,7 +1343,7 @@
           <a:p>
             <a:r>
               <a:rPr lang="en-US" dirty="0"/>
-              <a:t>We want to be exact about our contribution. The calibration method is not ours: it follows Pejaver and colleagues, and a general package already exists. Testing one disorder against another is routine inside the private database. Using a language model to read dataset labels has published benchmarks. What is ours is that every result can be regenerated from public data with one command, the audit itself, and the identification tool.</a:t>
+              <a:t>This is the page itself, and we will now show it live. You upload a probe list or choose one of the five examples. It reports how many probes exist on each array type, then the verdict, and it always says how many disorders it searched. Here it identifies Sotos syndrome and warns that the match is within a single study. The page runs offline and only ever takes probe identifiers, never patient data.</a:t>
             </a:r>
             <a:endParaRPr lang="en-US" dirty="0"/>
           </a:p>
@@ -1006,7 +1431,7 @@
           <a:p>
             <a:r>
               <a:rPr lang="en-US" dirty="0"/>
-              <a:t>We would rather tell you the weaknesses ourselves. The main cross-study result is based on only eighteen cases and six controls. Three signatures used controls that are not ordinary matched controls, and we flag them rather than trust them. Scores on a classifier's own disorder are optimistic, because the probes were chosen using those same samples. And our label check compares two computer-written rule sets, so a human review is still needed.</a:t>
+              <a:t>We want to be exact about our contribution. The calibration method is not ours: it follows Pejaver and colleagues, and a general package already exists. Testing one disorder against another is routine inside the private database. Using a language model to read dataset labels has published benchmarks. What is ours is that every result can be regenerated from public data with one command, the audit itself, and the identification tool.</a:t>
             </a:r>
             <a:endParaRPr lang="en-US" dirty="0"/>
           </a:p>
@@ -1094,7 +1519,7 @@
           <a:p>
             <a:r>
               <a:rPr lang="en-US" dirty="0"/>
-              <a:t>To conclude. Results measured inside one study look far stronger than public data can confirm. Only one cross-study test in six could be run, and the two disorders we could assess across studies earned no evidence. The fix is not a new method. It is data: the same disorder deposited by more than one site, each with its own controls. Everything we showed can be regenerated with the one command on this slide. Thank you.</a:t>
+              <a:t>We would rather tell you the weaknesses ourselves. Only one of six cross-study directions was computed, and it is based on only eighteen cases and six controls. We are not claiming that three disorders were tested across studies. Scores on a classifier's own disorder are optimistic, because the probes were chosen using those same samples. And our label check compares two computer-written rule sets, so a human review is still needed.</a:t>
             </a:r>
             <a:endParaRPr lang="en-US" dirty="0"/>
           </a:p>
@@ -1182,7 +1607,7 @@
           <a:p>
             <a:r>
               <a:rPr lang="en-US" dirty="0"/>
-              <a:t>This backup slide is for questions on method. The scoring rule is the published one: correlation with the case profile minus correlation with the control profile. Signatures use a Mann-Whitney test with a false discovery rate of five percent and a ten percent difference floor, and that threshold was changed exactly once. All data come from the Gene Expression Omnibus, a public archive, under the accession numbers listed here.</a:t>
+              <a:t>To conclude. Results measured inside one study look far stronger than public data can confirm. Only one cross-study test in six could be run, and two of the three eligible disorders were never tested across studies. Classifiers built with borrowed controls flagged about two thirds of unrelated patients. The fix is not a new method. It is data: the same disorder deposited by more than one site, each with its own controls. Everything we showed can be regenerated with the one command on this slide. Thank you.</a:t>
             </a:r>
             <a:endParaRPr lang="en-US" dirty="0"/>
           </a:p>
@@ -1206,6 +1631,94 @@
             <a:fld id="{F7021451-1387-4CA6-816F-3879F97B5CBC}" type="slidenum">
               <a:rPr lang="en-US"/>
               <a:t>16</a:t>
+            </a:fld>
+            <a:endParaRPr lang="en-US"/>
+          </a:p>
+        </p:txBody>
+      </p:sp>
+    </p:spTree>
+    <p:extLst>
+      <p:ext uri="{BB962C8B-B14F-4D97-AF65-F5344CB8AC3E}">
+        <p14:creationId xmlns:p14="http://schemas.microsoft.com/office/powerpoint/2010/main" val="1024086991"/>
+      </p:ext>
+    </p:extLst>
+  </p:cSld>
+  <p:clrMapOvr>
+    <a:masterClrMapping/>
+  </p:clrMapOvr>
+</p:notes>
+</file>
+
+<file path=ppt/notesSlides/notesSlide17.xml><?xml version="1.0" encoding="utf-8"?>
+<p:notes xmlns:a="http://schemas.openxmlformats.org/drawingml/2006/main" xmlns:r="http://schemas.openxmlformats.org/officeDocument/2006/relationships" xmlns:p="http://schemas.openxmlformats.org/presentationml/2006/main">
+  <p:cSld>
+    <p:spTree>
+      <p:nvGrpSpPr>
+        <p:cNvPr id="1" name=""/>
+        <p:cNvGrpSpPr/>
+        <p:nvPr/>
+      </p:nvGrpSpPr>
+      <p:grpSpPr>
+        <a:xfrm>
+          <a:off x="0" y="0"/>
+          <a:ext cx="0" cy="0"/>
+          <a:chOff x="0" y="0"/>
+          <a:chExt cx="0" cy="0"/>
+        </a:xfrm>
+      </p:grpSpPr>
+      <p:sp>
+        <p:nvSpPr>
+          <p:cNvPr id="2" name="Slide Image Placeholder 1"/>
+          <p:cNvSpPr>
+            <a:spLocks noGrp="1" noRot="1" noChangeAspect="1"/>
+          </p:cNvSpPr>
+          <p:nvPr>
+            <p:ph type="sldImg"/>
+          </p:nvPr>
+        </p:nvSpPr>
+        <p:spPr/>
+      </p:sp>
+      <p:sp>
+        <p:nvSpPr>
+          <p:cNvPr id="3" name="Notes Placeholder 2"/>
+          <p:cNvSpPr>
+            <a:spLocks noGrp="1"/>
+          </p:cNvSpPr>
+          <p:nvPr>
+            <p:ph type="body" idx="1"/>
+          </p:nvPr>
+        </p:nvSpPr>
+        <p:spPr/>
+        <p:txBody>
+          <a:bodyPr/>
+          <a:lstStyle/>
+          <a:p>
+            <a:r>
+              <a:rPr lang="en-US" dirty="0"/>
+              <a:t>This backup slide is for questions on method. The scoring rule is the published one: correlation with the case profile minus correlation with the control profile. Signatures use a Mann-Whitney test with a false discovery rate of five percent and a ten percent difference floor, and that threshold was changed exactly once. All data come from the Gene Expression Omnibus, a public archive, under the accession numbers listed here.</a:t>
+            </a:r>
+            <a:endParaRPr lang="en-US" dirty="0"/>
+          </a:p>
+        </p:txBody>
+      </p:sp>
+      <p:sp>
+        <p:nvSpPr>
+          <p:cNvPr id="4" name="Slide Number Placeholder 3"/>
+          <p:cNvSpPr>
+            <a:spLocks noGrp="1"/>
+          </p:cNvSpPr>
+          <p:nvPr>
+            <p:ph type="sldNum" sz="quarter" idx="10"/>
+          </p:nvPr>
+        </p:nvSpPr>
+        <p:spPr/>
+        <p:txBody>
+          <a:bodyPr/>
+          <a:lstStyle/>
+          <a:p>
+            <a:fld id="{F7021451-1387-4CA6-816F-3879F97B5CBC}" type="slidenum">
+              <a:rPr lang="en-US"/>
+              <a:t>17</a:t>
             </a:fld>
             <a:endParaRPr lang="en-US"/>
           </a:p>
@@ -1886,7 +2399,7 @@
           <a:p>
             <a:r>
               <a:rPr lang="en-US" dirty="0"/>
-              <a:t>The real test is to build a signature in one study and try it in another. This is called leave-one-study-out. Across the three eligible disorders that gives six attempts. Only one could be run, and it found five of eighteen held-out cases. The other five could not be run because one study alone did not have enough samples to build a signature. So for these disorders, transfer between laboratories is not confirmed by public data.</a:t>
+              <a:t>The real test is to build a signature in one study and try it in another. This is called leave-one-study-out. Three disorders were eligible, which gives six possible directions. We want to be plain about this: only one of the six could be computed. That one test found five of eighteen held-out cases. Kabuki syndrome and Nicolaides-Baraitser syndrome have no cross-study result at all, because one study alone did not have enough samples to build a signature.</a:t>
             </a:r>
             <a:endParaRPr lang="en-US" dirty="0"/>
           </a:p>
@@ -2776,7 +3289,7 @@
         <p:spPr>
           <a:xfrm>
             <a:off x="548640" y="1325880"/>
-            <a:ext cx="6341197" cy="4937760"/>
+            <a:ext cx="5743210" cy="4937760"/>
           </a:xfrm>
           <a:prstGeom prst="rect">
             <a:avLst/>
@@ -2887,7 +3400,7 @@
       </p:sp>
       <p:sp>
         <p:nvSpPr>
-          <p:cNvPr id="7" name="stat of healthy controls flagged by a classifier built with another laboratory's controls"/>
+          <p:cNvPr id="7" name="outlined rows note"/>
           <p:cNvSpPr/>
           <p:nvPr/>
         </p:nvSpPr>
@@ -2920,8 +3433,8 @@
         </p:nvSpPr>
         <p:spPr>
           <a:xfrm>
-            <a:off x="8275320" y="4023360"/>
-            <a:ext cx="3108960" cy="1005840"/>
+            <a:off x="8275320" y="4069080"/>
+            <a:ext cx="3108960" cy="411480"/>
           </a:xfrm>
           <a:prstGeom prst="rect">
             <a:avLst/>
@@ -2937,17 +3450,14 @@
               <a:buNone/>
             </a:pPr>
             <a:r>
-              <a:rPr lang="en-US" sz="5400" b="1" dirty="0">
-                <a:solidFill>
-                  <a:schemeClr val="accent6"/>
-                </a:solidFill>
-                <a:latin typeface="Cambria" pitchFamily="34" charset="0"/>
-                <a:ea typeface="Cambria" pitchFamily="34" charset="-122"/>
-                <a:cs typeface="Cambria" pitchFamily="34" charset="-120"/>
+              <a:rPr lang="en-US" sz="2200" b="1" dirty="0">
+                <a:solidFill>
+                  <a:schemeClr val="accent2"/>
+                </a:solidFill>
               </a:rPr>
-              <a:t>85.8%</a:t>
-            </a:r>
-            <a:endParaRPr lang="en-US" sz="5400" dirty="0"/>
+              <a:t>Outlined rows</a:t>
+            </a:r>
+            <a:endParaRPr lang="en-US" sz="2200" dirty="0"/>
           </a:p>
         </p:txBody>
       </p:sp>
@@ -2959,8 +3469,8 @@
         </p:nvSpPr>
         <p:spPr>
           <a:xfrm>
-            <a:off x="8275320" y="5029200"/>
-            <a:ext cx="3108960" cy="1097280"/>
+            <a:off x="8275320" y="4526280"/>
+            <a:ext cx="3108960" cy="1554480"/>
           </a:xfrm>
           <a:prstGeom prst="rect">
             <a:avLst/>
@@ -2981,7 +3491,7 @@
                   <a:schemeClr val="tx2"/>
                 </a:solidFill>
               </a:rPr>
-              <a:t>of healthy controls flagged by a classifier built with another laboratory's controls</a:t>
+              <a:t>were trained against controls from another series. They light up almost everywhere.</a:t>
             </a:r>
             <a:endParaRPr lang="en-US" sz="2000" dirty="0"/>
           </a:p>
@@ -3089,15 +3599,379 @@
                   <a:schemeClr val="tx1"/>
                 </a:solidFill>
               </a:rPr>
-              <a:t>Bring your own signature: five tests</a:t>
+              <a:t>Finding 4: the controls-source effect</a:t>
             </a:r>
             <a:endParaRPr lang="en-US" sz="3600" dirty="0"/>
+          </a:p>
+        </p:txBody>
+      </p:sp>
+      <p:sp>
+        <p:nvSpPr>
+          <p:cNvPr id="3" name="stat of other disorders' cases flagged with same-series controls (8 classifiers)"/>
+          <p:cNvSpPr/>
+          <p:nvPr/>
+        </p:nvSpPr>
+        <p:spPr>
+          <a:xfrm>
+            <a:off x="548640" y="1463040"/>
+            <a:ext cx="3383280" cy="2286000"/>
+          </a:xfrm>
+          <a:prstGeom prst="roundRect">
+            <a:avLst>
+              <a:gd name="adj" fmla="val 3200"/>
+            </a:avLst>
+          </a:prstGeom>
+          <a:solidFill>
+            <a:schemeClr val="bg2"/>
+          </a:solidFill>
+          <a:ln w="12700">
+            <a:solidFill>
+              <a:schemeClr val="bg2"/>
+            </a:solidFill>
+            <a:prstDash val="solid"/>
+          </a:ln>
+        </p:spPr>
+      </p:sp>
+      <p:sp>
+        <p:nvSpPr>
+          <p:cNvPr id="4" name="Text 2"/>
+          <p:cNvSpPr txBox="1"/>
+          <p:nvPr/>
+        </p:nvSpPr>
+        <p:spPr>
+          <a:xfrm>
+            <a:off x="777240" y="1600200"/>
+            <a:ext cx="2926080" cy="1005840"/>
+          </a:xfrm>
+          <a:prstGeom prst="rect">
+            <a:avLst/>
+          </a:prstGeom>
+          <a:noFill/>
+          <a:ln/>
+        </p:spPr>
+        <p:txBody>
+          <a:bodyPr wrap="square" lIns="0" tIns="0" rIns="0" bIns="0" rtlCol="0" anchor="t"/>
+          <a:lstStyle/>
+          <a:p>
+            <a:pPr indent="0" marL="0">
+              <a:buNone/>
+            </a:pPr>
+            <a:r>
+              <a:rPr lang="en-US" sz="5400" b="1" dirty="0">
+                <a:solidFill>
+                  <a:schemeClr val="accent1"/>
+                </a:solidFill>
+                <a:latin typeface="Cambria" pitchFamily="34" charset="0"/>
+                <a:ea typeface="Cambria" pitchFamily="34" charset="-122"/>
+                <a:cs typeface="Cambria" pitchFamily="34" charset="-120"/>
+              </a:rPr>
+              <a:t>11.9%</a:t>
+            </a:r>
+            <a:endParaRPr lang="en-US" sz="5400" dirty="0"/>
+          </a:p>
+        </p:txBody>
+      </p:sp>
+      <p:sp>
+        <p:nvSpPr>
+          <p:cNvPr id="5" name="Text 3"/>
+          <p:cNvSpPr txBox="1"/>
+          <p:nvPr/>
+        </p:nvSpPr>
+        <p:spPr>
+          <a:xfrm>
+            <a:off x="777240" y="2606040"/>
+            <a:ext cx="2926080" cy="1051560"/>
+          </a:xfrm>
+          <a:prstGeom prst="rect">
+            <a:avLst/>
+          </a:prstGeom>
+          <a:noFill/>
+          <a:ln/>
+        </p:spPr>
+        <p:txBody>
+          <a:bodyPr wrap="square" lIns="0" tIns="0" rIns="0" bIns="0" rtlCol="0" anchor="t"/>
+          <a:lstStyle/>
+          <a:p>
+            <a:pPr indent="0" marL="0">
+              <a:buNone/>
+            </a:pPr>
+            <a:r>
+              <a:rPr lang="en-US" sz="2000" dirty="0">
+                <a:solidFill>
+                  <a:schemeClr val="tx2"/>
+                </a:solidFill>
+              </a:rPr>
+              <a:t>of other disorders' cases flagged with same-series controls (8 classifiers)</a:t>
+            </a:r>
+            <a:endParaRPr lang="en-US" sz="2000" dirty="0"/>
+          </a:p>
+        </p:txBody>
+      </p:sp>
+      <p:sp>
+        <p:nvSpPr>
+          <p:cNvPr id="6" name="stat flagged with controls from another series (2 classifiers)"/>
+          <p:cNvSpPr/>
+          <p:nvPr/>
+        </p:nvSpPr>
+        <p:spPr>
+          <a:xfrm>
+            <a:off x="548640" y="3931920"/>
+            <a:ext cx="3383280" cy="2286000"/>
+          </a:xfrm>
+          <a:prstGeom prst="roundRect">
+            <a:avLst>
+              <a:gd name="adj" fmla="val 3200"/>
+            </a:avLst>
+          </a:prstGeom>
+          <a:solidFill>
+            <a:schemeClr val="bg2"/>
+          </a:solidFill>
+          <a:ln w="12700">
+            <a:solidFill>
+              <a:schemeClr val="bg2"/>
+            </a:solidFill>
+            <a:prstDash val="solid"/>
+          </a:ln>
+        </p:spPr>
+      </p:sp>
+      <p:sp>
+        <p:nvSpPr>
+          <p:cNvPr id="7" name="Text 5"/>
+          <p:cNvSpPr txBox="1"/>
+          <p:nvPr/>
+        </p:nvSpPr>
+        <p:spPr>
+          <a:xfrm>
+            <a:off x="777240" y="4069080"/>
+            <a:ext cx="2926080" cy="1005840"/>
+          </a:xfrm>
+          <a:prstGeom prst="rect">
+            <a:avLst/>
+          </a:prstGeom>
+          <a:noFill/>
+          <a:ln/>
+        </p:spPr>
+        <p:txBody>
+          <a:bodyPr wrap="square" lIns="0" tIns="0" rIns="0" bIns="0" rtlCol="0" anchor="t"/>
+          <a:lstStyle/>
+          <a:p>
+            <a:pPr indent="0" marL="0">
+              <a:buNone/>
+            </a:pPr>
+            <a:r>
+              <a:rPr lang="en-US" sz="5400" b="1" dirty="0">
+                <a:solidFill>
+                  <a:schemeClr val="accent2"/>
+                </a:solidFill>
+                <a:latin typeface="Cambria" pitchFamily="34" charset="0"/>
+                <a:ea typeface="Cambria" pitchFamily="34" charset="-122"/>
+                <a:cs typeface="Cambria" pitchFamily="34" charset="-120"/>
+              </a:rPr>
+              <a:t>68.1%</a:t>
+            </a:r>
+            <a:endParaRPr lang="en-US" sz="5400" dirty="0"/>
+          </a:p>
+        </p:txBody>
+      </p:sp>
+      <p:sp>
+        <p:nvSpPr>
+          <p:cNvPr id="8" name="Text 6"/>
+          <p:cNvSpPr txBox="1"/>
+          <p:nvPr/>
+        </p:nvSpPr>
+        <p:spPr>
+          <a:xfrm>
+            <a:off x="777240" y="5074920"/>
+            <a:ext cx="2926080" cy="1051560"/>
+          </a:xfrm>
+          <a:prstGeom prst="rect">
+            <a:avLst/>
+          </a:prstGeom>
+          <a:noFill/>
+          <a:ln/>
+        </p:spPr>
+        <p:txBody>
+          <a:bodyPr wrap="square" lIns="0" tIns="0" rIns="0" bIns="0" rtlCol="0" anchor="t"/>
+          <a:lstStyle/>
+          <a:p>
+            <a:pPr indent="0" marL="0">
+              <a:buNone/>
+            </a:pPr>
+            <a:r>
+              <a:rPr lang="en-US" sz="2000" dirty="0">
+                <a:solidFill>
+                  <a:schemeClr val="tx2"/>
+                </a:solidFill>
+              </a:rPr>
+              <a:t>flagged with controls from another series (2 classifiers)</a:t>
+            </a:r>
+            <a:endParaRPr lang="en-US" sz="2000" dirty="0"/>
           </a:p>
         </p:txBody>
       </p:sp>
       <p:graphicFrame>
         <p:nvGraphicFramePr>
-          <p:cNvPr id="12" name="fixture results table"/>
+          <p:cNvPr id="9" name="off-diagonal mean by classifier" descr="Bar chart of mean off-diagonal positive fraction per classifier"/>
+          <p:cNvGraphicFramePr/>
+          <p:nvPr/>
+        </p:nvGraphicFramePr>
+        <p:xfrm>
+          <a:off x="4206240" y="1371600"/>
+          <a:ext cx="7406640" cy="3840480"/>
+        </p:xfrm>
+        <a:graphic xmlns:a="http://schemas.openxmlformats.org/drawingml/2006/main">
+          <a:graphicData uri="http://schemas.openxmlformats.org/drawingml/2006/chart">
+            <c:chart xmlns:c="http://schemas.openxmlformats.org/drawingml/2006/chart" r:id="rId1"/>
+          </a:graphicData>
+        </a:graphic>
+      </p:graphicFrame>
+      <p:sp>
+        <p:nvSpPr>
+          <p:cNvPr id="10" name="Text 7"/>
+          <p:cNvSpPr txBox="1"/>
+          <p:nvPr/>
+        </p:nvSpPr>
+        <p:spPr>
+          <a:xfrm>
+            <a:off x="4206240" y="5303520"/>
+            <a:ext cx="7406640" cy="914400"/>
+          </a:xfrm>
+          <a:prstGeom prst="rect">
+            <a:avLst/>
+          </a:prstGeom>
+          <a:noFill/>
+          <a:ln/>
+        </p:spPr>
+        <p:txBody>
+          <a:bodyPr wrap="square" lIns="0" tIns="0" rIns="0" bIns="0" rtlCol="0" anchor="t"/>
+          <a:lstStyle/>
+          <a:p>
+            <a:pPr indent="0" marL="0">
+              <a:buNone/>
+            </a:pPr>
+            <a:r>
+              <a:rPr lang="en-US" sz="2000" b="1" dirty="0">
+                <a:solidFill>
+                  <a:schemeClr val="accent2"/>
+                </a:solidFill>
+              </a:rPr>
+              <a:t>Classifiers trained against out-of-series controls detect series membership, not disease. Coffin-Siris and Nicolaides-Baraitser are both in that category.</a:t>
+            </a:r>
+            <a:endParaRPr lang="en-US" sz="2000" dirty="0"/>
+          </a:p>
+        </p:txBody>
+      </p:sp>
+      <p:sp>
+        <p:nvSpPr>
+          <p:cNvPr id="25" name="Slide Number Placeholder 0"/>
+          <p:cNvSpPr>
+            <a:spLocks noGrp="1"/>
+          </p:cNvSpPr>
+          <p:nvPr>
+            <p:ph type="sldNum" sz="quarter" idx="4294967295"/>
+          </p:nvPr>
+        </p:nvSpPr>
+        <p:spPr>
+          <a:xfrm>
+            <a:off x="11274552" y="6400800"/>
+            <a:ext cx="457200" cy="274320"/>
+          </a:xfrm>
+          <a:prstGeom prst="rect">
+            <a:avLst/>
+          </a:prstGeom>
+          <a:extLst>
+            <a:ext uri="{C572A759-6A51-4108-AA02-DFA0A04FC94B}">
+              <ma14:wrappingTextBoxFlag xmlns:ma14="http://schemas.microsoft.com/office/mac/drawingml/2011/main" val="0"/>
+            </a:ext>
+          </a:extLst>
+        </p:spPr>
+        <p:txBody>
+          <a:bodyPr/>
+          <a:lstStyle>
+            <a:lvl1pPr>
+              <a:defRPr sz="1200">
+                <a:solidFill>
+                  <a:srgbClr val="8A8984"/>
+                </a:solidFill>
+              </a:defRPr>
+            </a:lvl1pPr>
+          </a:lstStyle>
+          <a:p>
+            <a:pPr algn="l"/>
+            <a:fld id="{F7021451-1387-4CA6-816F-3879F97B5CBC}" type="slidenum">
+              <a:rPr b="0" lang="en-US"/>
+              <a:t>11</a:t>
+            </a:fld>
+            <a:endParaRPr lang="en-US"/>
+          </a:p>
+        </p:txBody>
+      </p:sp>
+    </p:spTree>
+  </p:cSld>
+  <p:clrMapOvr>
+    <a:masterClrMapping/>
+  </p:clrMapOvr>
+</p:sld>
+</file>
+
+<file path=ppt/slides/slide12.xml><?xml version="1.0" encoding="utf-8"?>
+<p:sld xmlns:a="http://schemas.openxmlformats.org/drawingml/2006/main" xmlns:r="http://schemas.openxmlformats.org/officeDocument/2006/relationships" xmlns:p="http://schemas.openxmlformats.org/presentationml/2006/main">
+  <p:cSld name="Slide 12">
+    <p:spTree>
+      <p:nvGrpSpPr>
+        <p:cNvPr id="1" name=""/>
+        <p:cNvGrpSpPr/>
+        <p:nvPr/>
+      </p:nvGrpSpPr>
+      <p:grpSpPr>
+        <a:xfrm>
+          <a:off x="0" y="0"/>
+          <a:ext cx="0" cy="0"/>
+          <a:chOff x="0" y="0"/>
+          <a:chExt cx="0" cy="0"/>
+        </a:xfrm>
+      </p:grpSpPr>
+      <p:sp>
+        <p:nvSpPr>
+          <p:cNvPr id="2" name="Text 0"/>
+          <p:cNvSpPr/>
+          <p:nvPr>
+            <p:ph idx="100" type="title" hasCustomPrompt="1"/>
+          </p:nvPr>
+        </p:nvSpPr>
+        <p:spPr>
+          <a:xfrm>
+            <a:off x="548640" y="365760"/>
+            <a:ext cx="11091672" cy="914400"/>
+          </a:xfrm>
+          <a:prstGeom prst="rect">
+            <a:avLst/>
+          </a:prstGeom>
+          <a:noFill/>
+          <a:ln/>
+        </p:spPr>
+        <p:txBody>
+          <a:bodyPr wrap="square" lIns="0" tIns="0" rIns="0" bIns="0" rtlCol="0" anchor="ctr"/>
+          <a:lstStyle/>
+          <a:p>
+            <a:pPr algn="l" indent="0" marL="0">
+              <a:buNone/>
+            </a:pPr>
+            <a:r>
+              <a:rPr lang="en-US" sz="3600" b="1" dirty="0">
+                <a:solidFill>
+                  <a:schemeClr val="tx1"/>
+                </a:solidFill>
+              </a:rPr>
+              <a:t>Bring your own signature: five tests</a:t>
+            </a:r>
+            <a:endParaRPr lang="en-US" sz="3600" dirty="0"/>
+          </a:p>
+        </p:txBody>
+      </p:sp>
+      <p:graphicFrame>
+        <p:nvGraphicFramePr>
+          <p:cNvPr id="13" name="fixture results table"/>
           <p:cNvGraphicFramePr>
             <a:graphicFrameLocks noGrp="1"/>
           </p:cNvGraphicFramePr>
@@ -3693,7 +4567,7 @@
                             <a:srgbClr val="14213D"/>
                           </a:solidFill>
                         </a:rPr>
-                        <a:t>Sotos; score 26 against 11 for the runner-up</a:t>
+                        <a:t>Sotos; score 26 against 11 for the runner-up; ceiling Moderate</a:t>
                       </a:r>
                       <a:endParaRPr lang="en-US" sz="2000" dirty="0"/>
                     </a:p>
@@ -3899,289 +4773,9 @@
                   <a:schemeClr val="accent5"/>
                 </a:solidFill>
               </a:rPr>
-              <a:t>Random probes separate Sotos cases perfectly, so a match must also beat 1,000 random probe sets of the same size.</a:t>
+              <a:t>Random probes reach AUC 1.00 on Williams and at least 0.70 on 7 of 12 cohorts. AUC alone is unsafe here: the score against random probes is what makes "no match" work.</a:t>
             </a:r>
             <a:endParaRPr lang="en-US" sz="2200" dirty="0"/>
-          </a:p>
-        </p:txBody>
-      </p:sp>
-      <p:sp>
-        <p:nvSpPr>
-          <p:cNvPr id="25" name="Slide Number Placeholder 0"/>
-          <p:cNvSpPr>
-            <a:spLocks noGrp="1"/>
-          </p:cNvSpPr>
-          <p:nvPr>
-            <p:ph type="sldNum" sz="quarter" idx="4294967295"/>
-          </p:nvPr>
-        </p:nvSpPr>
-        <p:spPr>
-          <a:xfrm>
-            <a:off x="11274552" y="6400800"/>
-            <a:ext cx="457200" cy="274320"/>
-          </a:xfrm>
-          <a:prstGeom prst="rect">
-            <a:avLst/>
-          </a:prstGeom>
-          <a:extLst>
-            <a:ext uri="{C572A759-6A51-4108-AA02-DFA0A04FC94B}">
-              <ma14:wrappingTextBoxFlag xmlns:ma14="http://schemas.microsoft.com/office/mac/drawingml/2011/main" val="0"/>
-            </a:ext>
-          </a:extLst>
-        </p:spPr>
-        <p:txBody>
-          <a:bodyPr/>
-          <a:lstStyle>
-            <a:lvl1pPr>
-              <a:defRPr sz="1200">
-                <a:solidFill>
-                  <a:srgbClr val="8A8984"/>
-                </a:solidFill>
-              </a:defRPr>
-            </a:lvl1pPr>
-          </a:lstStyle>
-          <a:p>
-            <a:pPr algn="l"/>
-            <a:fld id="{F7021451-1387-4CA6-816F-3879F97B5CBC}" type="slidenum">
-              <a:rPr b="0" lang="en-US"/>
-              <a:t>11</a:t>
-            </a:fld>
-            <a:endParaRPr lang="en-US"/>
-          </a:p>
-        </p:txBody>
-      </p:sp>
-    </p:spTree>
-  </p:cSld>
-  <p:clrMapOvr>
-    <a:masterClrMapping/>
-  </p:clrMapOvr>
-</p:sld>
-</file>
-
-<file path=ppt/slides/slide12.xml><?xml version="1.0" encoding="utf-8"?>
-<p:sld xmlns:a="http://schemas.openxmlformats.org/drawingml/2006/main" xmlns:r="http://schemas.openxmlformats.org/officeDocument/2006/relationships" xmlns:p="http://schemas.openxmlformats.org/presentationml/2006/main">
-  <p:cSld name="Slide 12">
-    <p:spTree>
-      <p:nvGrpSpPr>
-        <p:cNvPr id="1" name=""/>
-        <p:cNvGrpSpPr/>
-        <p:nvPr/>
-      </p:nvGrpSpPr>
-      <p:grpSpPr>
-        <a:xfrm>
-          <a:off x="0" y="0"/>
-          <a:ext cx="0" cy="0"/>
-          <a:chOff x="0" y="0"/>
-          <a:chExt cx="0" cy="0"/>
-        </a:xfrm>
-      </p:grpSpPr>
-      <p:sp>
-        <p:nvSpPr>
-          <p:cNvPr id="2" name="Text 0"/>
-          <p:cNvSpPr/>
-          <p:nvPr>
-            <p:ph idx="100" type="title" hasCustomPrompt="1"/>
-          </p:nvPr>
-        </p:nvSpPr>
-        <p:spPr>
-          <a:xfrm>
-            <a:off x="548640" y="365760"/>
-            <a:ext cx="11091672" cy="914400"/>
-          </a:xfrm>
-          <a:prstGeom prst="rect">
-            <a:avLst/>
-          </a:prstGeom>
-          <a:noFill/>
-          <a:ln/>
-        </p:spPr>
-        <p:txBody>
-          <a:bodyPr wrap="square" lIns="0" tIns="0" rIns="0" bIns="0" rtlCol="0" anchor="ctr"/>
-          <a:lstStyle/>
-          <a:p>
-            <a:pPr algn="l" indent="0" marL="0">
-              <a:buNone/>
-            </a:pPr>
-            <a:r>
-              <a:rPr lang="en-US" sz="3600" b="1" dirty="0">
-                <a:solidFill>
-                  <a:schemeClr val="tx1"/>
-                </a:solidFill>
-              </a:rPr>
-              <a:t>Live demo: test your own signature</a:t>
-            </a:r>
-            <a:endParaRPr lang="en-US" sz="3600" dirty="0"/>
-          </a:p>
-        </p:txBody>
-      </p:sp>
-      <p:pic>
-        <p:nvPicPr>
-          <p:cNvPr id="3" name="Screenshot of the Test your own signature page" descr="Screenshot of the Test your own signature page">    </p:cNvPr>
-          <p:cNvPicPr>
-            <a:picLocks noChangeAspect="1"/>
-          </p:cNvPicPr>
-          <p:nvPr/>
-        </p:nvPicPr>
-        <p:blipFill>
-          <a:blip r:embed="rId1"/>
-          <a:stretch>
-            <a:fillRect/>
-          </a:stretch>
-        </p:blipFill>
-        <p:spPr>
-          <a:xfrm>
-            <a:off x="548640" y="1371600"/>
-            <a:ext cx="5204251" cy="4846320"/>
-          </a:xfrm>
-          <a:prstGeom prst="rect">
-            <a:avLst/>
-          </a:prstGeom>
-        </p:spPr>
-      </p:pic>
-      <p:sp>
-        <p:nvSpPr>
-          <p:cNvPr id="4" name="Text 1"/>
-          <p:cNvSpPr txBox="1"/>
-          <p:nvPr/>
-        </p:nvSpPr>
-        <p:spPr>
-          <a:xfrm>
-            <a:off x="7406640" y="1554480"/>
-            <a:ext cx="4206240" cy="3931920"/>
-          </a:xfrm>
-          <a:prstGeom prst="rect">
-            <a:avLst/>
-          </a:prstGeom>
-          <a:noFill/>
-          <a:ln/>
-        </p:spPr>
-        <p:txBody>
-          <a:bodyPr wrap="square" lIns="0" tIns="0" rIns="0" bIns="0" rtlCol="0" anchor="t"/>
-          <a:lstStyle/>
-          <a:p>
-            <a:pPr marL="342900" indent="-342900">
-              <a:spcAft>
-                <a:spcPts val="1200"/>
-              </a:spcAft>
-              <a:buSzPct val="100000"/>
-              <a:buChar char="•"/>
-            </a:pPr>
-            <a:r>
-              <a:rPr lang="en-US" sz="2000" dirty="0">
-                <a:solidFill>
-                  <a:schemeClr val="tx1"/>
-                </a:solidFill>
-              </a:rPr>
-              <a:t>Upload a probe list, or pick an example</a:t>
-            </a:r>
-            <a:endParaRPr lang="en-US" sz="2000" dirty="0"/>
-          </a:p>
-          <a:p>
-            <a:pPr marL="342900" indent="-342900">
-              <a:spcAft>
-                <a:spcPts val="1200"/>
-              </a:spcAft>
-              <a:buSzPct val="100000"/>
-              <a:buChar char="•"/>
-            </a:pPr>
-            <a:r>
-              <a:rPr lang="en-US" sz="2000" dirty="0">
-                <a:solidFill>
-                  <a:schemeClr val="tx1"/>
-                </a:solidFill>
-              </a:rPr>
-              <a:t>Coverage on three array platforms</a:t>
-            </a:r>
-            <a:endParaRPr lang="en-US" sz="2000" dirty="0"/>
-          </a:p>
-          <a:p>
-            <a:pPr marL="342900" indent="-342900">
-              <a:spcAft>
-                <a:spcPts val="1200"/>
-              </a:spcAft>
-              <a:buSzPct val="100000"/>
-              <a:buChar char="•"/>
-            </a:pPr>
-            <a:r>
-              <a:rPr lang="en-US" sz="2000" dirty="0">
-                <a:solidFill>
-                  <a:schemeClr val="tx1"/>
-                </a:solidFill>
-              </a:rPr>
-              <a:t>A verdict that states how many disorders were searched</a:t>
-            </a:r>
-            <a:endParaRPr lang="en-US" sz="2000" dirty="0"/>
-          </a:p>
-          <a:p>
-            <a:pPr marL="342900" indent="-342900">
-              <a:spcAft>
-                <a:spcPts val="1200"/>
-              </a:spcAft>
-              <a:buSzPct val="100000"/>
-              <a:buChar char="•"/>
-            </a:pPr>
-            <a:r>
-              <a:rPr lang="en-US" sz="2000" dirty="0">
-                <a:solidFill>
-                  <a:schemeClr val="tx1"/>
-                </a:solidFill>
-              </a:rPr>
-              <a:t>A warning when the match is within one study only</a:t>
-            </a:r>
-            <a:endParaRPr lang="en-US" sz="2000" dirty="0"/>
-          </a:p>
-          <a:p>
-            <a:pPr marL="342900" indent="-342900">
-              <a:spcAft>
-                <a:spcPts val="1200"/>
-              </a:spcAft>
-              <a:buSzPct val="100000"/>
-              <a:buChar char="•"/>
-            </a:pPr>
-            <a:r>
-              <a:rPr lang="en-US" sz="2000" dirty="0">
-                <a:solidFill>
-                  <a:schemeClr val="tx1"/>
-                </a:solidFill>
-              </a:rPr>
-              <a:t>Runs offline from files in the repository</a:t>
-            </a:r>
-            <a:endParaRPr lang="en-US" sz="2000" dirty="0"/>
-          </a:p>
-        </p:txBody>
-      </p:sp>
-      <p:sp>
-        <p:nvSpPr>
-          <p:cNvPr id="5" name="Text 2"/>
-          <p:cNvSpPr txBox="1"/>
-          <p:nvPr/>
-        </p:nvSpPr>
-        <p:spPr>
-          <a:xfrm>
-            <a:off x="7406640" y="5532120"/>
-            <a:ext cx="4206240" cy="685800"/>
-          </a:xfrm>
-          <a:prstGeom prst="rect">
-            <a:avLst/>
-          </a:prstGeom>
-          <a:noFill/>
-          <a:ln/>
-        </p:spPr>
-        <p:txBody>
-          <a:bodyPr wrap="square" lIns="0" tIns="0" rIns="0" bIns="0" rtlCol="0" anchor="t"/>
-          <a:lstStyle/>
-          <a:p>
-            <a:pPr indent="0" marL="0">
-              <a:buNone/>
-            </a:pPr>
-            <a:r>
-              <a:rPr lang="en-US" sz="2000" i="1" dirty="0">
-                <a:solidFill>
-                  <a:schemeClr val="tx2"/>
-                </a:solidFill>
-              </a:rPr>
-              <a:t>Probe identifiers only. No patient data is ever accepted.</a:t>
-            </a:r>
-            <a:endParaRPr lang="en-US" sz="2000" dirty="0"/>
           </a:p>
         </p:txBody>
       </p:sp>
@@ -4287,110 +4881,46 @@
                   <a:schemeClr val="tx1"/>
                 </a:solidFill>
               </a:rPr>
-              <a:t>What is ours and what is not</a:t>
+              <a:t>Live demo: test your own signature</a:t>
             </a:r>
             <a:endParaRPr lang="en-US" sz="3600" dirty="0"/>
           </a:p>
         </p:txBody>
       </p:sp>
-      <p:sp>
-        <p:nvSpPr>
-          <p:cNvPr id="3" name="Not ours panel"/>
-          <p:cNvSpPr/>
-          <p:nvPr/>
-        </p:nvSpPr>
-        <p:spPr>
-          <a:xfrm>
-            <a:off x="548640" y="1508760"/>
-            <a:ext cx="5349240" cy="3703320"/>
-          </a:xfrm>
-          <a:prstGeom prst="roundRect">
-            <a:avLst>
-              <a:gd name="adj" fmla="val 1975"/>
-            </a:avLst>
-          </a:prstGeom>
-          <a:solidFill>
-            <a:schemeClr val="bg2"/>
-          </a:solidFill>
-          <a:ln w="12700">
-            <a:solidFill>
-              <a:schemeClr val="bg2"/>
-            </a:solidFill>
-            <a:prstDash val="solid"/>
-          </a:ln>
-        </p:spPr>
-      </p:sp>
-      <p:sp>
-        <p:nvSpPr>
-          <p:cNvPr id="4" name="Not ours marker"/>
-          <p:cNvSpPr/>
-          <p:nvPr/>
-        </p:nvSpPr>
-        <p:spPr>
-          <a:xfrm>
-            <a:off x="868680" y="1783080"/>
-            <a:ext cx="457200" cy="457200"/>
-          </a:xfrm>
-          <a:prstGeom prst="ellipse">
-            <a:avLst/>
-          </a:prstGeom>
-          <a:solidFill>
-            <a:schemeClr val="accent4"/>
-          </a:solidFill>
-          <a:ln w="12700">
-            <a:solidFill>
-              <a:schemeClr val="accent4"/>
-            </a:solidFill>
-            <a:prstDash val="solid"/>
-          </a:ln>
-        </p:spPr>
-      </p:sp>
-      <p:sp>
-        <p:nvSpPr>
-          <p:cNvPr id="5" name="Text 3"/>
+      <p:pic>
+        <p:nvPicPr>
+          <p:cNvPr id="3" name="Screenshot of the Test your own signature page" descr="Screenshot of the Test your own signature page">    </p:cNvPr>
+          <p:cNvPicPr>
+            <a:picLocks noChangeAspect="1"/>
+          </p:cNvPicPr>
+          <p:nvPr/>
+        </p:nvPicPr>
+        <p:blipFill>
+          <a:blip r:embed="rId1"/>
+          <a:stretch>
+            <a:fillRect/>
+          </a:stretch>
+        </p:blipFill>
+        <p:spPr>
+          <a:xfrm>
+            <a:off x="548640" y="1371600"/>
+            <a:ext cx="5204251" cy="4846320"/>
+          </a:xfrm>
+          <a:prstGeom prst="rect">
+            <a:avLst/>
+          </a:prstGeom>
+        </p:spPr>
+      </p:pic>
+      <p:sp>
+        <p:nvSpPr>
+          <p:cNvPr id="4" name="Text 1"/>
           <p:cNvSpPr txBox="1"/>
           <p:nvPr/>
         </p:nvSpPr>
         <p:spPr>
           <a:xfrm>
-            <a:off x="1508760" y="1755648"/>
-            <a:ext cx="4023360" cy="502920"/>
-          </a:xfrm>
-          <a:prstGeom prst="rect">
-            <a:avLst/>
-          </a:prstGeom>
-          <a:noFill/>
-          <a:ln/>
-        </p:spPr>
-        <p:txBody>
-          <a:bodyPr wrap="square" lIns="0" tIns="0" rIns="0" bIns="0" rtlCol="0" anchor="ctr"/>
-          <a:lstStyle/>
-          <a:p>
-            <a:pPr indent="0" marL="0">
-              <a:buNone/>
-            </a:pPr>
-            <a:r>
-              <a:rPr lang="en-US" sz="2600" b="1" dirty="0">
-                <a:solidFill>
-                  <a:schemeClr val="tx1"/>
-                </a:solidFill>
-              </a:rPr>
-              <a:t>Not ours</a:t>
-            </a:r>
-            <a:endParaRPr lang="en-US" sz="2600" dirty="0"/>
-          </a:p>
-        </p:txBody>
-      </p:sp>
-      <p:sp>
-        <p:nvSpPr>
-          <p:cNvPr id="6" name="Text 4"/>
-          <p:cNvSpPr txBox="1"/>
-          <p:nvPr/>
-        </p:nvSpPr>
-        <p:spPr>
-          <a:xfrm>
-            <a:off x="868680" y="2514600"/>
-            <a:ext cx="4709160" cy="2560320"/>
+            <a:off x="7406640" y="1554480"/>
+            <a:ext cx="4206240" cy="3931920"/>
           </a:xfrm>
           <a:prstGeom prst="rect">
             <a:avLst/>
@@ -4415,7 +4945,7 @@
                   <a:schemeClr val="tx1"/>
                 </a:solidFill>
               </a:rPr>
-              <a:t>The calibration method (Pejaver 2022; a general tool is on CRAN)</a:t>
+              <a:t>Upload a probe list, or pick an example</a:t>
             </a:r>
             <a:endParaRPr lang="en-US" sz="2000" dirty="0"/>
           </a:p>
@@ -4433,7 +4963,7 @@
                   <a:schemeClr val="tx1"/>
                 </a:solidFill>
               </a:rPr>
-              <a:t>Testing one disorder against another (routine inside the private database)</a:t>
+              <a:t>Coverage on three array platforms</a:t>
             </a:r>
             <a:endParaRPr lang="en-US" sz="2000" dirty="0"/>
           </a:p>
@@ -4451,120 +4981,10 @@
                   <a:schemeClr val="tx1"/>
                 </a:solidFill>
               </a:rPr>
-              <a:t>Using a language model to read dataset labels (published benchmarks exist)</a:t>
+              <a:t>A verdict that states how many disorders were searched</a:t>
             </a:r>
             <a:endParaRPr lang="en-US" sz="2000" dirty="0"/>
           </a:p>
-        </p:txBody>
-      </p:sp>
-      <p:sp>
-        <p:nvSpPr>
-          <p:cNvPr id="7" name="Ours panel"/>
-          <p:cNvSpPr/>
-          <p:nvPr/>
-        </p:nvSpPr>
-        <p:spPr>
-          <a:xfrm>
-            <a:off x="6172200" y="1508760"/>
-            <a:ext cx="5349240" cy="3703320"/>
-          </a:xfrm>
-          <a:prstGeom prst="roundRect">
-            <a:avLst>
-              <a:gd name="adj" fmla="val 1975"/>
-            </a:avLst>
-          </a:prstGeom>
-          <a:solidFill>
-            <a:schemeClr val="bg2"/>
-          </a:solidFill>
-          <a:ln w="12700">
-            <a:solidFill>
-              <a:schemeClr val="bg2"/>
-            </a:solidFill>
-            <a:prstDash val="solid"/>
-          </a:ln>
-        </p:spPr>
-      </p:sp>
-      <p:sp>
-        <p:nvSpPr>
-          <p:cNvPr id="8" name="Ours marker"/>
-          <p:cNvSpPr/>
-          <p:nvPr/>
-        </p:nvSpPr>
-        <p:spPr>
-          <a:xfrm>
-            <a:off x="6492240" y="1783080"/>
-            <a:ext cx="457200" cy="457200"/>
-          </a:xfrm>
-          <a:prstGeom prst="ellipse">
-            <a:avLst/>
-          </a:prstGeom>
-          <a:solidFill>
-            <a:schemeClr val="accent1"/>
-          </a:solidFill>
-          <a:ln w="12700">
-            <a:solidFill>
-              <a:schemeClr val="accent1"/>
-            </a:solidFill>
-            <a:prstDash val="solid"/>
-          </a:ln>
-        </p:spPr>
-      </p:sp>
-      <p:sp>
-        <p:nvSpPr>
-          <p:cNvPr id="9" name="Text 7"/>
-          <p:cNvSpPr txBox="1"/>
-          <p:nvPr/>
-        </p:nvSpPr>
-        <p:spPr>
-          <a:xfrm>
-            <a:off x="7132320" y="1755648"/>
-            <a:ext cx="4023360" cy="502920"/>
-          </a:xfrm>
-          <a:prstGeom prst="rect">
-            <a:avLst/>
-          </a:prstGeom>
-          <a:noFill/>
-          <a:ln/>
-        </p:spPr>
-        <p:txBody>
-          <a:bodyPr wrap="square" lIns="0" tIns="0" rIns="0" bIns="0" rtlCol="0" anchor="ctr"/>
-          <a:lstStyle/>
-          <a:p>
-            <a:pPr indent="0" marL="0">
-              <a:buNone/>
-            </a:pPr>
-            <a:r>
-              <a:rPr lang="en-US" sz="2600" b="1" dirty="0">
-                <a:solidFill>
-                  <a:schemeClr val="tx1"/>
-                </a:solidFill>
-              </a:rPr>
-              <a:t>Ours</a:t>
-            </a:r>
-            <a:endParaRPr lang="en-US" sz="2600" dirty="0"/>
-          </a:p>
-        </p:txBody>
-      </p:sp>
-      <p:sp>
-        <p:nvSpPr>
-          <p:cNvPr id="10" name="Text 8"/>
-          <p:cNvSpPr txBox="1"/>
-          <p:nvPr/>
-        </p:nvSpPr>
-        <p:spPr>
-          <a:xfrm>
-            <a:off x="6492240" y="2514600"/>
-            <a:ext cx="4709160" cy="2560320"/>
-          </a:xfrm>
-          <a:prstGeom prst="rect">
-            <a:avLst/>
-          </a:prstGeom>
-          <a:noFill/>
-          <a:ln/>
-        </p:spPr>
-        <p:txBody>
-          <a:bodyPr wrap="square" lIns="0" tIns="0" rIns="0" bIns="0" rtlCol="0" anchor="t"/>
-          <a:lstStyle/>
           <a:p>
             <a:pPr marL="342900" indent="-342900">
               <a:spcAft>
@@ -4579,7 +4999,7 @@
                   <a:schemeClr val="tx1"/>
                 </a:solidFill>
               </a:rPr>
-              <a:t>Every result regenerated from public data by one command</a:t>
+              <a:t>A warning when the match is within one study only</a:t>
             </a:r>
             <a:endParaRPr lang="en-US" sz="2000" dirty="0"/>
           </a:p>
@@ -4597,40 +5017,22 @@
                   <a:schemeClr val="tx1"/>
                 </a:solidFill>
               </a:rPr>
-              <a:t>The audit: 12 verdicts, 6 cross-study attempts, a full 12 by 13 matrix</a:t>
+              <a:t>Runs offline from files in the repository</a:t>
             </a:r>
             <a:endParaRPr lang="en-US" sz="2000" dirty="0"/>
           </a:p>
-          <a:p>
-            <a:pPr marL="342900" indent="-342900">
-              <a:spcAft>
-                <a:spcPts val="1200"/>
-              </a:spcAft>
-              <a:buSzPct val="100000"/>
-              <a:buChar char="•"/>
-            </a:pPr>
-            <a:r>
-              <a:rPr lang="en-US" sz="2000" dirty="0">
-                <a:solidFill>
-                  <a:schemeClr val="tx1"/>
-                </a:solidFill>
-              </a:rPr>
-              <a:t>The identification engine with its random-probe control</a:t>
-            </a:r>
-            <a:endParaRPr lang="en-US" sz="2000" dirty="0"/>
-          </a:p>
-        </p:txBody>
-      </p:sp>
-      <p:sp>
-        <p:nvSpPr>
-          <p:cNvPr id="11" name="Text 9"/>
+        </p:txBody>
+      </p:sp>
+      <p:sp>
+        <p:nvSpPr>
+          <p:cNvPr id="5" name="Text 2"/>
           <p:cNvSpPr txBox="1"/>
           <p:nvPr/>
         </p:nvSpPr>
         <p:spPr>
           <a:xfrm>
-            <a:off x="548640" y="5486400"/>
-            <a:ext cx="11091672" cy="548640"/>
+            <a:off x="7406640" y="5532120"/>
+            <a:ext cx="4206240" cy="685800"/>
           </a:xfrm>
           <a:prstGeom prst="rect">
             <a:avLst/>
@@ -4646,14 +5048,14 @@
               <a:buNone/>
             </a:pPr>
             <a:r>
-              <a:rPr lang="en-US" sz="2400" b="1" dirty="0">
-                <a:solidFill>
-                  <a:schemeClr val="accent5"/>
+              <a:rPr lang="en-US" sz="2000" i="1" dirty="0">
+                <a:solidFill>
+                  <a:schemeClr val="tx2"/>
                 </a:solidFill>
               </a:rPr>
-              <a:t>Our claim is that this can be checked, not that the methods are new.</a:t>
-            </a:r>
-            <a:endParaRPr lang="en-US" sz="2400" dirty="0"/>
+              <a:t>Probe identifiers only. No patient data is ever accepted.</a:t>
+            </a:r>
+            <a:endParaRPr lang="en-US" sz="2000" dirty="0"/>
           </a:p>
         </p:txBody>
       </p:sp>
@@ -4759,7 +5161,7 @@
                   <a:schemeClr val="tx1"/>
                 </a:solidFill>
               </a:rPr>
-              <a:t>Limitations, before you ask</a:t>
+              <a:t>What is ours and what is not</a:t>
             </a:r>
             <a:endParaRPr lang="en-US" sz="3600" dirty="0"/>
           </a:p>
@@ -4767,18 +5169,18 @@
       </p:sp>
       <p:sp>
         <p:nvSpPr>
-          <p:cNvPr id="3" name="limitation 1"/>
+          <p:cNvPr id="3" name="Not ours panel"/>
           <p:cNvSpPr/>
           <p:nvPr/>
         </p:nvSpPr>
         <p:spPr>
           <a:xfrm>
             <a:off x="548640" y="1508760"/>
-            <a:ext cx="5349240" cy="2148840"/>
+            <a:ext cx="5349240" cy="3703320"/>
           </a:xfrm>
           <a:prstGeom prst="roundRect">
             <a:avLst>
-              <a:gd name="adj" fmla="val 3404"/>
+              <a:gd name="adj" fmla="val 1975"/>
             </a:avLst>
           </a:prstGeom>
           <a:solidFill>
@@ -4794,14 +5196,39 @@
       </p:sp>
       <p:sp>
         <p:nvSpPr>
-          <p:cNvPr id="4" name="Text 2"/>
+          <p:cNvPr id="4" name="Not ours marker"/>
+          <p:cNvSpPr/>
+          <p:nvPr/>
+        </p:nvSpPr>
+        <p:spPr>
+          <a:xfrm>
+            <a:off x="868680" y="1783080"/>
+            <a:ext cx="457200" cy="457200"/>
+          </a:xfrm>
+          <a:prstGeom prst="ellipse">
+            <a:avLst/>
+          </a:prstGeom>
+          <a:solidFill>
+            <a:schemeClr val="accent4"/>
+          </a:solidFill>
+          <a:ln w="12700">
+            <a:solidFill>
+              <a:schemeClr val="accent4"/>
+            </a:solidFill>
+            <a:prstDash val="solid"/>
+          </a:ln>
+        </p:spPr>
+      </p:sp>
+      <p:sp>
+        <p:nvSpPr>
+          <p:cNvPr id="5" name="Text 3"/>
           <p:cNvSpPr txBox="1"/>
           <p:nvPr/>
         </p:nvSpPr>
         <p:spPr>
           <a:xfrm>
-            <a:off x="868680" y="1737360"/>
-            <a:ext cx="4709160" cy="457200"/>
+            <a:off x="1508760" y="1755648"/>
+            <a:ext cx="4023360" cy="502920"/>
           </a:xfrm>
           <a:prstGeom prst="rect">
             <a:avLst/>
@@ -4810,34 +5237,34 @@
           <a:ln/>
         </p:spPr>
         <p:txBody>
-          <a:bodyPr wrap="square" lIns="0" tIns="0" rIns="0" bIns="0" rtlCol="0" anchor="t"/>
+          <a:bodyPr wrap="square" lIns="0" tIns="0" rIns="0" bIns="0" rtlCol="0" anchor="ctr"/>
           <a:lstStyle/>
           <a:p>
             <a:pPr indent="0" marL="0">
               <a:buNone/>
             </a:pPr>
             <a:r>
-              <a:rPr lang="en-US" sz="2400" b="1" dirty="0">
-                <a:solidFill>
-                  <a:schemeClr val="accent6"/>
+              <a:rPr lang="en-US" sz="2600" b="1" dirty="0">
+                <a:solidFill>
+                  <a:schemeClr val="tx1"/>
                 </a:solidFill>
               </a:rPr>
-              <a:t>Small numbers</a:t>
-            </a:r>
-            <a:endParaRPr lang="en-US" sz="2400" dirty="0"/>
-          </a:p>
-        </p:txBody>
-      </p:sp>
-      <p:sp>
-        <p:nvSpPr>
-          <p:cNvPr id="5" name="Text 3"/>
+              <a:t>Not ours</a:t>
+            </a:r>
+            <a:endParaRPr lang="en-US" sz="2600" dirty="0"/>
+          </a:p>
+        </p:txBody>
+      </p:sp>
+      <p:sp>
+        <p:nvSpPr>
+          <p:cNvPr id="6" name="Text 4"/>
           <p:cNvSpPr txBox="1"/>
           <p:nvPr/>
         </p:nvSpPr>
         <p:spPr>
           <a:xfrm>
-            <a:off x="868680" y="2286000"/>
-            <a:ext cx="4709160" cy="1280160"/>
+            <a:off x="868680" y="2514600"/>
+            <a:ext cx="4709160" cy="2560320"/>
           </a:xfrm>
           <a:prstGeom prst="rect">
             <a:avLst/>
@@ -4849,35 +5276,75 @@
           <a:bodyPr wrap="square" lIns="0" tIns="0" rIns="0" bIns="0" rtlCol="0" anchor="t"/>
           <a:lstStyle/>
           <a:p>
-            <a:pPr indent="0" marL="0">
-              <a:buNone/>
+            <a:pPr marL="342900" indent="-342900">
+              <a:spcAft>
+                <a:spcPts val="1200"/>
+              </a:spcAft>
+              <a:buSzPct val="100000"/>
+              <a:buChar char="•"/>
             </a:pPr>
             <a:r>
               <a:rPr lang="en-US" sz="2000" dirty="0">
                 <a:solidFill>
-                  <a:schemeClr val="tx2"/>
+                  <a:schemeClr val="tx1"/>
                 </a:solidFill>
               </a:rPr>
-              <a:t>The headline cross-study result rests on 18 cases and 6 controls.</a:t>
+              <a:t>The calibration method (Pejaver 2022; a general tool is on CRAN)</a:t>
             </a:r>
             <a:endParaRPr lang="en-US" sz="2000" dirty="0"/>
           </a:p>
-        </p:txBody>
-      </p:sp>
-      <p:sp>
-        <p:nvSpPr>
-          <p:cNvPr id="6" name="limitation 2"/>
+          <a:p>
+            <a:pPr marL="342900" indent="-342900">
+              <a:spcAft>
+                <a:spcPts val="1200"/>
+              </a:spcAft>
+              <a:buSzPct val="100000"/>
+              <a:buChar char="•"/>
+            </a:pPr>
+            <a:r>
+              <a:rPr lang="en-US" sz="2000" dirty="0">
+                <a:solidFill>
+                  <a:schemeClr val="tx1"/>
+                </a:solidFill>
+              </a:rPr>
+              <a:t>Testing one disorder against another (routine inside the private database)</a:t>
+            </a:r>
+            <a:endParaRPr lang="en-US" sz="2000" dirty="0"/>
+          </a:p>
+          <a:p>
+            <a:pPr marL="342900" indent="-342900">
+              <a:spcAft>
+                <a:spcPts val="1200"/>
+              </a:spcAft>
+              <a:buSzPct val="100000"/>
+              <a:buChar char="•"/>
+            </a:pPr>
+            <a:r>
+              <a:rPr lang="en-US" sz="2000" dirty="0">
+                <a:solidFill>
+                  <a:schemeClr val="tx1"/>
+                </a:solidFill>
+              </a:rPr>
+              <a:t>Using a language model to read dataset labels (published benchmarks exist)</a:t>
+            </a:r>
+            <a:endParaRPr lang="en-US" sz="2000" dirty="0"/>
+          </a:p>
+        </p:txBody>
+      </p:sp>
+      <p:sp>
+        <p:nvSpPr>
+          <p:cNvPr id="7" name="Ours panel"/>
           <p:cNvSpPr/>
           <p:nvPr/>
         </p:nvSpPr>
         <p:spPr>
           <a:xfrm>
             <a:off x="6172200" y="1508760"/>
-            <a:ext cx="5349240" cy="2148840"/>
+            <a:ext cx="5349240" cy="3703320"/>
           </a:xfrm>
           <a:prstGeom prst="roundRect">
             <a:avLst>
-              <a:gd name="adj" fmla="val 3404"/>
+              <a:gd name="adj" fmla="val 1975"/>
             </a:avLst>
           </a:prstGeom>
           <a:solidFill>
@@ -4893,14 +5360,39 @@
       </p:sp>
       <p:sp>
         <p:nvSpPr>
-          <p:cNvPr id="7" name="Text 5"/>
+          <p:cNvPr id="8" name="Ours marker"/>
+          <p:cNvSpPr/>
+          <p:nvPr/>
+        </p:nvSpPr>
+        <p:spPr>
+          <a:xfrm>
+            <a:off x="6492240" y="1783080"/>
+            <a:ext cx="457200" cy="457200"/>
+          </a:xfrm>
+          <a:prstGeom prst="ellipse">
+            <a:avLst/>
+          </a:prstGeom>
+          <a:solidFill>
+            <a:schemeClr val="accent1"/>
+          </a:solidFill>
+          <a:ln w="12700">
+            <a:solidFill>
+              <a:schemeClr val="accent1"/>
+            </a:solidFill>
+            <a:prstDash val="solid"/>
+          </a:ln>
+        </p:spPr>
+      </p:sp>
+      <p:sp>
+        <p:nvSpPr>
+          <p:cNvPr id="9" name="Text 7"/>
           <p:cNvSpPr txBox="1"/>
           <p:nvPr/>
         </p:nvSpPr>
         <p:spPr>
           <a:xfrm>
-            <a:off x="6492240" y="1737360"/>
-            <a:ext cx="4709160" cy="457200"/>
+            <a:off x="7132320" y="1755648"/>
+            <a:ext cx="4023360" cy="502920"/>
           </a:xfrm>
           <a:prstGeom prst="rect">
             <a:avLst/>
@@ -4909,34 +5401,110 @@
           <a:ln/>
         </p:spPr>
         <p:txBody>
-          <a:bodyPr wrap="square" lIns="0" tIns="0" rIns="0" bIns="0" rtlCol="0" anchor="t"/>
+          <a:bodyPr wrap="square" lIns="0" tIns="0" rIns="0" bIns="0" rtlCol="0" anchor="ctr"/>
           <a:lstStyle/>
           <a:p>
             <a:pPr indent="0" marL="0">
               <a:buNone/>
             </a:pPr>
             <a:r>
-              <a:rPr lang="en-US" sz="2400" b="1" dirty="0">
-                <a:solidFill>
-                  <a:schemeClr val="accent6"/>
+              <a:rPr lang="en-US" sz="2600" b="1" dirty="0">
+                <a:solidFill>
+                  <a:schemeClr val="tx1"/>
                 </a:solidFill>
               </a:rPr>
-              <a:t>Borrowed controls</a:t>
-            </a:r>
-            <a:endParaRPr lang="en-US" sz="2400" dirty="0"/>
-          </a:p>
-        </p:txBody>
-      </p:sp>
-      <p:sp>
-        <p:nvSpPr>
-          <p:cNvPr id="8" name="Text 6"/>
+              <a:t>Ours</a:t>
+            </a:r>
+            <a:endParaRPr lang="en-US" sz="2600" dirty="0"/>
+          </a:p>
+        </p:txBody>
+      </p:sp>
+      <p:sp>
+        <p:nvSpPr>
+          <p:cNvPr id="10" name="Text 8"/>
           <p:cNvSpPr txBox="1"/>
           <p:nvPr/>
         </p:nvSpPr>
         <p:spPr>
           <a:xfrm>
-            <a:off x="6492240" y="2286000"/>
-            <a:ext cx="4709160" cy="1280160"/>
+            <a:off x="6492240" y="2514600"/>
+            <a:ext cx="4709160" cy="2560320"/>
+          </a:xfrm>
+          <a:prstGeom prst="rect">
+            <a:avLst/>
+          </a:prstGeom>
+          <a:noFill/>
+          <a:ln/>
+        </p:spPr>
+        <p:txBody>
+          <a:bodyPr wrap="square" lIns="0" tIns="0" rIns="0" bIns="0" rtlCol="0" anchor="t"/>
+          <a:lstStyle/>
+          <a:p>
+            <a:pPr marL="342900" indent="-342900">
+              <a:spcAft>
+                <a:spcPts val="1200"/>
+              </a:spcAft>
+              <a:buSzPct val="100000"/>
+              <a:buChar char="•"/>
+            </a:pPr>
+            <a:r>
+              <a:rPr lang="en-US" sz="2000" dirty="0">
+                <a:solidFill>
+                  <a:schemeClr val="tx1"/>
+                </a:solidFill>
+              </a:rPr>
+              <a:t>Every result regenerated from public data by one command</a:t>
+            </a:r>
+            <a:endParaRPr lang="en-US" sz="2000" dirty="0"/>
+          </a:p>
+          <a:p>
+            <a:pPr marL="342900" indent="-342900">
+              <a:spcAft>
+                <a:spcPts val="1200"/>
+              </a:spcAft>
+              <a:buSzPct val="100000"/>
+              <a:buChar char="•"/>
+            </a:pPr>
+            <a:r>
+              <a:rPr lang="en-US" sz="2000" dirty="0">
+                <a:solidFill>
+                  <a:schemeClr val="tx1"/>
+                </a:solidFill>
+              </a:rPr>
+              <a:t>The audit: 12 verdicts, 6 cross-study attempts, a full 12 by 13 matrix</a:t>
+            </a:r>
+            <a:endParaRPr lang="en-US" sz="2000" dirty="0"/>
+          </a:p>
+          <a:p>
+            <a:pPr marL="342900" indent="-342900">
+              <a:spcAft>
+                <a:spcPts val="1200"/>
+              </a:spcAft>
+              <a:buSzPct val="100000"/>
+              <a:buChar char="•"/>
+            </a:pPr>
+            <a:r>
+              <a:rPr lang="en-US" sz="2000" dirty="0">
+                <a:solidFill>
+                  <a:schemeClr val="tx1"/>
+                </a:solidFill>
+              </a:rPr>
+              <a:t>The identification engine with its random-probe control</a:t>
+            </a:r>
+            <a:endParaRPr lang="en-US" sz="2000" dirty="0"/>
+          </a:p>
+        </p:txBody>
+      </p:sp>
+      <p:sp>
+        <p:nvSpPr>
+          <p:cNvPr id="11" name="Text 9"/>
+          <p:cNvSpPr txBox="1"/>
+          <p:nvPr/>
+        </p:nvSpPr>
+        <p:spPr>
+          <a:xfrm>
+            <a:off x="548640" y="5486400"/>
+            <a:ext cx="11091672" cy="548640"/>
           </a:xfrm>
           <a:prstGeom prst="rect">
             <a:avLst/>
@@ -4952,212 +5520,14 @@
               <a:buNone/>
             </a:pPr>
             <a:r>
-              <a:rPr lang="en-US" sz="2000" dirty="0">
-                <a:solidFill>
-                  <a:schemeClr val="tx2"/>
+              <a:rPr lang="en-US" sz="2400" b="1" dirty="0">
+                <a:solidFill>
+                  <a:schemeClr val="accent5"/>
                 </a:solidFill>
               </a:rPr>
-              <a:t>Two signatures used another laboratory's controls and one used siblings. They are flagged, not trusted.</a:t>
-            </a:r>
-            <a:endParaRPr lang="en-US" sz="2000" dirty="0"/>
-          </a:p>
-        </p:txBody>
-      </p:sp>
-      <p:sp>
-        <p:nvSpPr>
-          <p:cNvPr id="9" name="limitation 3"/>
-          <p:cNvSpPr/>
-          <p:nvPr/>
-        </p:nvSpPr>
-        <p:spPr>
-          <a:xfrm>
-            <a:off x="548640" y="3886200"/>
-            <a:ext cx="5349240" cy="2148840"/>
-          </a:xfrm>
-          <a:prstGeom prst="roundRect">
-            <a:avLst>
-              <a:gd name="adj" fmla="val 3404"/>
-            </a:avLst>
-          </a:prstGeom>
-          <a:solidFill>
-            <a:schemeClr val="bg2"/>
-          </a:solidFill>
-          <a:ln w="12700">
-            <a:solidFill>
-              <a:schemeClr val="bg2"/>
-            </a:solidFill>
-            <a:prstDash val="solid"/>
-          </a:ln>
-        </p:spPr>
-      </p:sp>
-      <p:sp>
-        <p:nvSpPr>
-          <p:cNvPr id="10" name="Text 8"/>
-          <p:cNvSpPr txBox="1"/>
-          <p:nvPr/>
-        </p:nvSpPr>
-        <p:spPr>
-          <a:xfrm>
-            <a:off x="868680" y="4114800"/>
-            <a:ext cx="4709160" cy="457200"/>
-          </a:xfrm>
-          <a:prstGeom prst="rect">
-            <a:avLst/>
-          </a:prstGeom>
-          <a:noFill/>
-          <a:ln/>
-        </p:spPr>
-        <p:txBody>
-          <a:bodyPr wrap="square" lIns="0" tIns="0" rIns="0" bIns="0" rtlCol="0" anchor="t"/>
-          <a:lstStyle/>
-          <a:p>
-            <a:pPr indent="0" marL="0">
-              <a:buNone/>
-            </a:pPr>
-            <a:r>
-              <a:rPr lang="en-US" sz="2400" b="1" dirty="0">
-                <a:solidFill>
-                  <a:schemeClr val="accent6"/>
-                </a:solidFill>
-              </a:rPr>
-              <a:t>Optimistic self-scores</a:t>
+              <a:t>Our claim is that this can be checked, not that the methods are new.</a:t>
             </a:r>
             <a:endParaRPr lang="en-US" sz="2400" dirty="0"/>
-          </a:p>
-        </p:txBody>
-      </p:sp>
-      <p:sp>
-        <p:nvSpPr>
-          <p:cNvPr id="11" name="Text 9"/>
-          <p:cNvSpPr txBox="1"/>
-          <p:nvPr/>
-        </p:nvSpPr>
-        <p:spPr>
-          <a:xfrm>
-            <a:off x="868680" y="4663440"/>
-            <a:ext cx="4709160" cy="1280160"/>
-          </a:xfrm>
-          <a:prstGeom prst="rect">
-            <a:avLst/>
-          </a:prstGeom>
-          <a:noFill/>
-          <a:ln/>
-        </p:spPr>
-        <p:txBody>
-          <a:bodyPr wrap="square" lIns="0" tIns="0" rIns="0" bIns="0" rtlCol="0" anchor="t"/>
-          <a:lstStyle/>
-          <a:p>
-            <a:pPr indent="0" marL="0">
-              <a:buNone/>
-            </a:pPr>
-            <a:r>
-              <a:rPr lang="en-US" sz="2000" dirty="0">
-                <a:solidFill>
-                  <a:schemeClr val="tx2"/>
-                </a:solidFill>
-              </a:rPr>
-              <a:t>Probes were chosen using all training samples, so own-disorder sensitivity is flattering.</a:t>
-            </a:r>
-            <a:endParaRPr lang="en-US" sz="2000" dirty="0"/>
-          </a:p>
-        </p:txBody>
-      </p:sp>
-      <p:sp>
-        <p:nvSpPr>
-          <p:cNvPr id="12" name="limitation 4"/>
-          <p:cNvSpPr/>
-          <p:nvPr/>
-        </p:nvSpPr>
-        <p:spPr>
-          <a:xfrm>
-            <a:off x="6172200" y="3886200"/>
-            <a:ext cx="5349240" cy="2148840"/>
-          </a:xfrm>
-          <a:prstGeom prst="roundRect">
-            <a:avLst>
-              <a:gd name="adj" fmla="val 3404"/>
-            </a:avLst>
-          </a:prstGeom>
-          <a:solidFill>
-            <a:schemeClr val="bg2"/>
-          </a:solidFill>
-          <a:ln w="12700">
-            <a:solidFill>
-              <a:schemeClr val="bg2"/>
-            </a:solidFill>
-            <a:prstDash val="solid"/>
-          </a:ln>
-        </p:spPr>
-      </p:sp>
-      <p:sp>
-        <p:nvSpPr>
-          <p:cNvPr id="13" name="Text 11"/>
-          <p:cNvSpPr txBox="1"/>
-          <p:nvPr/>
-        </p:nvSpPr>
-        <p:spPr>
-          <a:xfrm>
-            <a:off x="6492240" y="4114800"/>
-            <a:ext cx="4709160" cy="457200"/>
-          </a:xfrm>
-          <a:prstGeom prst="rect">
-            <a:avLst/>
-          </a:prstGeom>
-          <a:noFill/>
-          <a:ln/>
-        </p:spPr>
-        <p:txBody>
-          <a:bodyPr wrap="square" lIns="0" tIns="0" rIns="0" bIns="0" rtlCol="0" anchor="t"/>
-          <a:lstStyle/>
-          <a:p>
-            <a:pPr indent="0" marL="0">
-              <a:buNone/>
-            </a:pPr>
-            <a:r>
-              <a:rPr lang="en-US" sz="2400" b="1" dirty="0">
-                <a:solidFill>
-                  <a:schemeClr val="accent6"/>
-                </a:solidFill>
-              </a:rPr>
-              <a:t>Labels checked by AI only</a:t>
-            </a:r>
-            <a:endParaRPr lang="en-US" sz="2400" dirty="0"/>
-          </a:p>
-        </p:txBody>
-      </p:sp>
-      <p:sp>
-        <p:nvSpPr>
-          <p:cNvPr id="14" name="Text 12"/>
-          <p:cNvSpPr txBox="1"/>
-          <p:nvPr/>
-        </p:nvSpPr>
-        <p:spPr>
-          <a:xfrm>
-            <a:off x="6492240" y="4663440"/>
-            <a:ext cx="4709160" cy="1280160"/>
-          </a:xfrm>
-          <a:prstGeom prst="rect">
-            <a:avLst/>
-          </a:prstGeom>
-          <a:noFill/>
-          <a:ln/>
-        </p:spPr>
-        <p:txBody>
-          <a:bodyPr wrap="square" lIns="0" tIns="0" rIns="0" bIns="0" rtlCol="0" anchor="t"/>
-          <a:lstStyle/>
-          <a:p>
-            <a:pPr indent="0" marL="0">
-              <a:buNone/>
-            </a:pPr>
-            <a:r>
-              <a:rPr lang="en-US" sz="2000" dirty="0">
-                <a:solidFill>
-                  <a:schemeClr val="tx2"/>
-                </a:solidFill>
-              </a:rPr>
-              <a:t>Two AI-written rule sets agree on 81 of 81 samples. Human curation is still pending.</a:t>
-            </a:r>
-            <a:endParaRPr lang="en-US" sz="2000" dirty="0"/>
           </a:p>
         </p:txBody>
       </p:sp>
@@ -5241,8 +5611,8 @@
         </p:nvSpPr>
         <p:spPr>
           <a:xfrm>
-            <a:off x="548640" y="2011680"/>
-            <a:ext cx="11091672" cy="1737360"/>
+            <a:off x="548640" y="365760"/>
+            <a:ext cx="11091672" cy="914400"/>
           </a:xfrm>
           <a:prstGeom prst="rect">
             <a:avLst/>
@@ -5251,122 +5621,46 @@
           <a:ln/>
         </p:spPr>
         <p:txBody>
-          <a:bodyPr wrap="square" lIns="0" tIns="0" rIns="0" bIns="0" rtlCol="0" anchor="t"/>
+          <a:bodyPr wrap="square" lIns="0" tIns="0" rIns="0" bIns="0" rtlCol="0" anchor="ctr"/>
           <a:lstStyle/>
           <a:p>
             <a:pPr algn="l" indent="0" marL="0">
               <a:buNone/>
             </a:pPr>
             <a:r>
-              <a:rPr lang="en-US" sz="4400" b="1" dirty="0">
-                <a:solidFill>
-                  <a:schemeClr val="bg1"/>
+              <a:rPr lang="en-US" sz="3600" b="1" dirty="0">
+                <a:solidFill>
+                  <a:schemeClr val="tx1"/>
                 </a:solidFill>
               </a:rPr>
-              <a:t>Public data support far less than within-study numbers suggest</a:t>
-            </a:r>
-            <a:endParaRPr lang="en-US" sz="4400" dirty="0"/>
-          </a:p>
-        </p:txBody>
-      </p:sp>
-      <p:sp>
-        <p:nvSpPr>
-          <p:cNvPr id="3" name="Text 1"/>
-          <p:cNvSpPr txBox="1"/>
-          <p:nvPr/>
-        </p:nvSpPr>
-        <p:spPr>
-          <a:xfrm>
-            <a:off x="548640" y="3657600"/>
-            <a:ext cx="11091672" cy="1737360"/>
-          </a:xfrm>
-          <a:prstGeom prst="rect">
-            <a:avLst/>
-          </a:prstGeom>
-          <a:noFill/>
-          <a:ln/>
-        </p:spPr>
-        <p:txBody>
-          <a:bodyPr wrap="square" lIns="0" tIns="0" rIns="0" bIns="0" rtlCol="0" anchor="t"/>
-          <a:lstStyle/>
-          <a:p>
-            <a:pPr marL="342900" indent="-342900">
-              <a:spcAft>
-                <a:spcPts val="800"/>
-              </a:spcAft>
-              <a:buSzPct val="100000"/>
-              <a:buChar char="•"/>
-            </a:pPr>
-            <a:r>
-              <a:rPr lang="en-US" sz="2200" dirty="0">
-                <a:solidFill>
-                  <a:schemeClr val="bg1"/>
-                </a:solidFill>
-              </a:rPr>
-              <a:t>1 of 6 cross-study tests could be run</a:t>
-            </a:r>
-            <a:endParaRPr lang="en-US" sz="2200" dirty="0"/>
-          </a:p>
-          <a:p>
-            <a:pPr marL="342900" indent="-342900">
-              <a:spcAft>
-                <a:spcPts val="800"/>
-              </a:spcAft>
-              <a:buSzPct val="100000"/>
-              <a:buChar char="•"/>
-            </a:pPr>
-            <a:r>
-              <a:rPr lang="en-US" sz="2200" dirty="0">
-                <a:solidFill>
-                  <a:schemeClr val="bg1"/>
-                </a:solidFill>
-              </a:rPr>
-              <a:t>2 disorders have a between-study bound; both read "No evidence"</a:t>
-            </a:r>
-            <a:endParaRPr lang="en-US" sz="2200" dirty="0"/>
-          </a:p>
-          <a:p>
-            <a:pPr marL="342900" indent="-342900">
-              <a:spcAft>
-                <a:spcPts val="800"/>
-              </a:spcAft>
-              <a:buSzPct val="100000"/>
-              <a:buChar char="•"/>
-            </a:pPr>
-            <a:r>
-              <a:rPr lang="en-US" sz="2200" dirty="0">
-                <a:solidFill>
-                  <a:schemeClr val="bg1"/>
-                </a:solidFill>
-              </a:rPr>
-              <a:t>What the field needs: the same disorder from more than one site, with each site's own controls</a:t>
-            </a:r>
-            <a:endParaRPr lang="en-US" sz="2200" dirty="0"/>
-          </a:p>
-        </p:txBody>
-      </p:sp>
-      <p:sp>
-        <p:nvSpPr>
-          <p:cNvPr id="4" name="command panel"/>
+              <a:t>Limitations, before you ask</a:t>
+            </a:r>
+            <a:endParaRPr lang="en-US" sz="3600" dirty="0"/>
+          </a:p>
+        </p:txBody>
+      </p:sp>
+      <p:sp>
+        <p:nvSpPr>
+          <p:cNvPr id="3" name="limitation 1"/>
           <p:cNvSpPr/>
           <p:nvPr/>
         </p:nvSpPr>
         <p:spPr>
           <a:xfrm>
-            <a:off x="548640" y="5577840"/>
-            <a:ext cx="11091672" cy="777240"/>
+            <a:off x="548640" y="1508760"/>
+            <a:ext cx="5349240" cy="2148840"/>
           </a:xfrm>
           <a:prstGeom prst="roundRect">
             <a:avLst>
-              <a:gd name="adj" fmla="val 9412"/>
+              <a:gd name="adj" fmla="val 3404"/>
             </a:avLst>
           </a:prstGeom>
           <a:solidFill>
-            <a:schemeClr val="tx2"/>
+            <a:schemeClr val="bg2"/>
           </a:solidFill>
           <a:ln w="12700">
             <a:solidFill>
-              <a:schemeClr val="tx2"/>
+              <a:schemeClr val="bg2"/>
             </a:solidFill>
             <a:prstDash val="solid"/>
           </a:ln>
@@ -5374,14 +5668,14 @@
       </p:sp>
       <p:sp>
         <p:nvSpPr>
-          <p:cNvPr id="5" name="Text 3"/>
+          <p:cNvPr id="4" name="Text 2"/>
           <p:cNvSpPr txBox="1"/>
           <p:nvPr/>
         </p:nvSpPr>
         <p:spPr>
           <a:xfrm>
-            <a:off x="822960" y="5577840"/>
-            <a:ext cx="10543032" cy="777240"/>
+            <a:off x="868680" y="1737360"/>
+            <a:ext cx="4709160" cy="457200"/>
           </a:xfrm>
           <a:prstGeom prst="rect">
             <a:avLst/>
@@ -5390,25 +5684,44 @@
           <a:ln/>
         </p:spPr>
         <p:txBody>
-          <a:bodyPr wrap="square" lIns="0" tIns="0" rIns="0" bIns="0" rtlCol="0" anchor="ctr"/>
+          <a:bodyPr wrap="square" lIns="0" tIns="0" rIns="0" bIns="0" rtlCol="0" anchor="t"/>
           <a:lstStyle/>
           <a:p>
             <a:pPr indent="0" marL="0">
               <a:buNone/>
             </a:pPr>
             <a:r>
-              <a:rPr lang="en-US" sz="2000" dirty="0">
-                <a:solidFill>
-                  <a:schemeClr val="bg1"/>
-                </a:solidFill>
-                <a:latin typeface="Courier New" pitchFamily="34" charset="0"/>
-                <a:ea typeface="Courier New" pitchFamily="34" charset="-122"/>
-                <a:cs typeface="Courier New" pitchFamily="34" charset="-120"/>
+              <a:rPr lang="en-US" sz="2400" b="1" dirty="0">
+                <a:solidFill>
+                  <a:schemeClr val="accent6"/>
+                </a:solidFill>
               </a:rPr>
-              <a:t>python scripts/reproduce.py</a:t>
-            </a:r>
-            <a:endParaRPr lang="en-US" sz="2000" dirty="0"/>
-          </a:p>
+              <a:t>Small numbers</a:t>
+            </a:r>
+            <a:endParaRPr lang="en-US" sz="2400" dirty="0"/>
+          </a:p>
+        </p:txBody>
+      </p:sp>
+      <p:sp>
+        <p:nvSpPr>
+          <p:cNvPr id="5" name="Text 3"/>
+          <p:cNvSpPr txBox="1"/>
+          <p:nvPr/>
+        </p:nvSpPr>
+        <p:spPr>
+          <a:xfrm>
+            <a:off x="868680" y="2286000"/>
+            <a:ext cx="4709160" cy="1280160"/>
+          </a:xfrm>
+          <a:prstGeom prst="rect">
+            <a:avLst/>
+          </a:prstGeom>
+          <a:noFill/>
+          <a:ln/>
+        </p:spPr>
+        <p:txBody>
+          <a:bodyPr wrap="square" lIns="0" tIns="0" rIns="0" bIns="0" rtlCol="0" anchor="t"/>
+          <a:lstStyle/>
           <a:p>
             <a:pPr indent="0" marL="0">
               <a:buNone/>
@@ -5416,15 +5729,354 @@
             <a:r>
               <a:rPr lang="en-US" sz="2000" dirty="0">
                 <a:solidFill>
-                  <a:schemeClr val="bg1"/>
-                </a:solidFill>
-                <a:latin typeface="Courier New" pitchFamily="34" charset="0"/>
-                <a:ea typeface="Courier New" pitchFamily="34" charset="-122"/>
-                <a:cs typeface="Courier New" pitchFamily="34" charset="-120"/>
+                  <a:schemeClr val="tx2"/>
+                </a:solidFill>
               </a:rPr>
-              <a:t>github.com/cleverlyblue0009/EpiGrade</a:t>
+              <a:t>That one cross-study result rests on 18 cases and 6 controls.</a:t>
             </a:r>
             <a:endParaRPr lang="en-US" sz="2000" dirty="0"/>
+          </a:p>
+        </p:txBody>
+      </p:sp>
+      <p:sp>
+        <p:nvSpPr>
+          <p:cNvPr id="6" name="limitation 2"/>
+          <p:cNvSpPr/>
+          <p:nvPr/>
+        </p:nvSpPr>
+        <p:spPr>
+          <a:xfrm>
+            <a:off x="6172200" y="1508760"/>
+            <a:ext cx="5349240" cy="2148840"/>
+          </a:xfrm>
+          <a:prstGeom prst="roundRect">
+            <a:avLst>
+              <a:gd name="adj" fmla="val 3404"/>
+            </a:avLst>
+          </a:prstGeom>
+          <a:solidFill>
+            <a:schemeClr val="bg2"/>
+          </a:solidFill>
+          <a:ln w="12700">
+            <a:solidFill>
+              <a:schemeClr val="bg2"/>
+            </a:solidFill>
+            <a:prstDash val="solid"/>
+          </a:ln>
+        </p:spPr>
+      </p:sp>
+      <p:sp>
+        <p:nvSpPr>
+          <p:cNvPr id="7" name="Text 5"/>
+          <p:cNvSpPr txBox="1"/>
+          <p:nvPr/>
+        </p:nvSpPr>
+        <p:spPr>
+          <a:xfrm>
+            <a:off x="6492240" y="1737360"/>
+            <a:ext cx="4709160" cy="457200"/>
+          </a:xfrm>
+          <a:prstGeom prst="rect">
+            <a:avLst/>
+          </a:prstGeom>
+          <a:noFill/>
+          <a:ln/>
+        </p:spPr>
+        <p:txBody>
+          <a:bodyPr wrap="square" lIns="0" tIns="0" rIns="0" bIns="0" rtlCol="0" anchor="t"/>
+          <a:lstStyle/>
+          <a:p>
+            <a:pPr indent="0" marL="0">
+              <a:buNone/>
+            </a:pPr>
+            <a:r>
+              <a:rPr lang="en-US" sz="2400" b="1" dirty="0">
+                <a:solidFill>
+                  <a:schemeClr val="accent6"/>
+                </a:solidFill>
+              </a:rPr>
+              <a:t>One cross-study test</a:t>
+            </a:r>
+            <a:endParaRPr lang="en-US" sz="2400" dirty="0"/>
+          </a:p>
+        </p:txBody>
+      </p:sp>
+      <p:sp>
+        <p:nvSpPr>
+          <p:cNvPr id="8" name="Text 6"/>
+          <p:cNvSpPr txBox="1"/>
+          <p:nvPr/>
+        </p:nvSpPr>
+        <p:spPr>
+          <a:xfrm>
+            <a:off x="6492240" y="2286000"/>
+            <a:ext cx="4709160" cy="1280160"/>
+          </a:xfrm>
+          <a:prstGeom prst="rect">
+            <a:avLst/>
+          </a:prstGeom>
+          <a:noFill/>
+          <a:ln/>
+        </p:spPr>
+        <p:txBody>
+          <a:bodyPr wrap="square" lIns="0" tIns="0" rIns="0" bIns="0" rtlCol="0" anchor="t"/>
+          <a:lstStyle/>
+          <a:p>
+            <a:pPr indent="0" marL="0">
+              <a:buNone/>
+            </a:pPr>
+            <a:r>
+              <a:rPr lang="en-US" sz="2000" dirty="0">
+                <a:solidFill>
+                  <a:schemeClr val="tx2"/>
+                </a:solidFill>
+              </a:rPr>
+              <a:t>Only 1 of 6 directions was computed. We are not claiming three disorders were tested across studies.</a:t>
+            </a:r>
+            <a:endParaRPr lang="en-US" sz="2000" dirty="0"/>
+          </a:p>
+        </p:txBody>
+      </p:sp>
+      <p:sp>
+        <p:nvSpPr>
+          <p:cNvPr id="9" name="limitation 3"/>
+          <p:cNvSpPr/>
+          <p:nvPr/>
+        </p:nvSpPr>
+        <p:spPr>
+          <a:xfrm>
+            <a:off x="548640" y="3886200"/>
+            <a:ext cx="5349240" cy="2148840"/>
+          </a:xfrm>
+          <a:prstGeom prst="roundRect">
+            <a:avLst>
+              <a:gd name="adj" fmla="val 3404"/>
+            </a:avLst>
+          </a:prstGeom>
+          <a:solidFill>
+            <a:schemeClr val="bg2"/>
+          </a:solidFill>
+          <a:ln w="12700">
+            <a:solidFill>
+              <a:schemeClr val="bg2"/>
+            </a:solidFill>
+            <a:prstDash val="solid"/>
+          </a:ln>
+        </p:spPr>
+      </p:sp>
+      <p:sp>
+        <p:nvSpPr>
+          <p:cNvPr id="10" name="Text 8"/>
+          <p:cNvSpPr txBox="1"/>
+          <p:nvPr/>
+        </p:nvSpPr>
+        <p:spPr>
+          <a:xfrm>
+            <a:off x="868680" y="4114800"/>
+            <a:ext cx="4709160" cy="457200"/>
+          </a:xfrm>
+          <a:prstGeom prst="rect">
+            <a:avLst/>
+          </a:prstGeom>
+          <a:noFill/>
+          <a:ln/>
+        </p:spPr>
+        <p:txBody>
+          <a:bodyPr wrap="square" lIns="0" tIns="0" rIns="0" bIns="0" rtlCol="0" anchor="t"/>
+          <a:lstStyle/>
+          <a:p>
+            <a:pPr indent="0" marL="0">
+              <a:buNone/>
+            </a:pPr>
+            <a:r>
+              <a:rPr lang="en-US" sz="2400" b="1" dirty="0">
+                <a:solidFill>
+                  <a:schemeClr val="accent6"/>
+                </a:solidFill>
+              </a:rPr>
+              <a:t>Optimistic self-scores</a:t>
+            </a:r>
+            <a:endParaRPr lang="en-US" sz="2400" dirty="0"/>
+          </a:p>
+        </p:txBody>
+      </p:sp>
+      <p:sp>
+        <p:nvSpPr>
+          <p:cNvPr id="11" name="Text 9"/>
+          <p:cNvSpPr txBox="1"/>
+          <p:nvPr/>
+        </p:nvSpPr>
+        <p:spPr>
+          <a:xfrm>
+            <a:off x="868680" y="4663440"/>
+            <a:ext cx="4709160" cy="1280160"/>
+          </a:xfrm>
+          <a:prstGeom prst="rect">
+            <a:avLst/>
+          </a:prstGeom>
+          <a:noFill/>
+          <a:ln/>
+        </p:spPr>
+        <p:txBody>
+          <a:bodyPr wrap="square" lIns="0" tIns="0" rIns="0" bIns="0" rtlCol="0" anchor="t"/>
+          <a:lstStyle/>
+          <a:p>
+            <a:pPr indent="0" marL="0">
+              <a:buNone/>
+            </a:pPr>
+            <a:r>
+              <a:rPr lang="en-US" sz="2000" dirty="0">
+                <a:solidFill>
+                  <a:schemeClr val="tx2"/>
+                </a:solidFill>
+              </a:rPr>
+              <a:t>Probes were chosen using all training samples, so own-disorder sensitivity is flattering.</a:t>
+            </a:r>
+            <a:endParaRPr lang="en-US" sz="2000" dirty="0"/>
+          </a:p>
+        </p:txBody>
+      </p:sp>
+      <p:sp>
+        <p:nvSpPr>
+          <p:cNvPr id="12" name="limitation 4"/>
+          <p:cNvSpPr/>
+          <p:nvPr/>
+        </p:nvSpPr>
+        <p:spPr>
+          <a:xfrm>
+            <a:off x="6172200" y="3886200"/>
+            <a:ext cx="5349240" cy="2148840"/>
+          </a:xfrm>
+          <a:prstGeom prst="roundRect">
+            <a:avLst>
+              <a:gd name="adj" fmla="val 3404"/>
+            </a:avLst>
+          </a:prstGeom>
+          <a:solidFill>
+            <a:schemeClr val="bg2"/>
+          </a:solidFill>
+          <a:ln w="12700">
+            <a:solidFill>
+              <a:schemeClr val="bg2"/>
+            </a:solidFill>
+            <a:prstDash val="solid"/>
+          </a:ln>
+        </p:spPr>
+      </p:sp>
+      <p:sp>
+        <p:nvSpPr>
+          <p:cNvPr id="13" name="Text 11"/>
+          <p:cNvSpPr txBox="1"/>
+          <p:nvPr/>
+        </p:nvSpPr>
+        <p:spPr>
+          <a:xfrm>
+            <a:off x="6492240" y="4114800"/>
+            <a:ext cx="4709160" cy="457200"/>
+          </a:xfrm>
+          <a:prstGeom prst="rect">
+            <a:avLst/>
+          </a:prstGeom>
+          <a:noFill/>
+          <a:ln/>
+        </p:spPr>
+        <p:txBody>
+          <a:bodyPr wrap="square" lIns="0" tIns="0" rIns="0" bIns="0" rtlCol="0" anchor="t"/>
+          <a:lstStyle/>
+          <a:p>
+            <a:pPr indent="0" marL="0">
+              <a:buNone/>
+            </a:pPr>
+            <a:r>
+              <a:rPr lang="en-US" sz="2400" b="1" dirty="0">
+                <a:solidFill>
+                  <a:schemeClr val="accent6"/>
+                </a:solidFill>
+              </a:rPr>
+              <a:t>Labels checked by AI only</a:t>
+            </a:r>
+            <a:endParaRPr lang="en-US" sz="2400" dirty="0"/>
+          </a:p>
+        </p:txBody>
+      </p:sp>
+      <p:sp>
+        <p:nvSpPr>
+          <p:cNvPr id="14" name="Text 12"/>
+          <p:cNvSpPr txBox="1"/>
+          <p:nvPr/>
+        </p:nvSpPr>
+        <p:spPr>
+          <a:xfrm>
+            <a:off x="6492240" y="4663440"/>
+            <a:ext cx="4709160" cy="1280160"/>
+          </a:xfrm>
+          <a:prstGeom prst="rect">
+            <a:avLst/>
+          </a:prstGeom>
+          <a:noFill/>
+          <a:ln/>
+        </p:spPr>
+        <p:txBody>
+          <a:bodyPr wrap="square" lIns="0" tIns="0" rIns="0" bIns="0" rtlCol="0" anchor="t"/>
+          <a:lstStyle/>
+          <a:p>
+            <a:pPr indent="0" marL="0">
+              <a:buNone/>
+            </a:pPr>
+            <a:r>
+              <a:rPr lang="en-US" sz="2000" dirty="0">
+                <a:solidFill>
+                  <a:schemeClr val="tx2"/>
+                </a:solidFill>
+              </a:rPr>
+              <a:t>Two AI-written rule sets agree on 81 of 81 samples. Human curation is still pending.</a:t>
+            </a:r>
+            <a:endParaRPr lang="en-US" sz="2000" dirty="0"/>
+          </a:p>
+        </p:txBody>
+      </p:sp>
+      <p:sp>
+        <p:nvSpPr>
+          <p:cNvPr id="25" name="Slide Number Placeholder 0"/>
+          <p:cNvSpPr>
+            <a:spLocks noGrp="1"/>
+          </p:cNvSpPr>
+          <p:nvPr>
+            <p:ph type="sldNum" sz="quarter" idx="4294967295"/>
+          </p:nvPr>
+        </p:nvSpPr>
+        <p:spPr>
+          <a:xfrm>
+            <a:off x="11274552" y="6400800"/>
+            <a:ext cx="457200" cy="274320"/>
+          </a:xfrm>
+          <a:prstGeom prst="rect">
+            <a:avLst/>
+          </a:prstGeom>
+          <a:extLst>
+            <a:ext uri="{C572A759-6A51-4108-AA02-DFA0A04FC94B}">
+              <ma14:wrappingTextBoxFlag xmlns:ma14="http://schemas.microsoft.com/office/mac/drawingml/2011/main" val="0"/>
+            </a:ext>
+          </a:extLst>
+        </p:spPr>
+        <p:txBody>
+          <a:bodyPr/>
+          <a:lstStyle>
+            <a:lvl1pPr>
+              <a:defRPr sz="1200">
+                <a:solidFill>
+                  <a:srgbClr val="8A8984"/>
+                </a:solidFill>
+              </a:defRPr>
+            </a:lvl1pPr>
+          </a:lstStyle>
+          <a:p>
+            <a:pPr algn="l"/>
+            <a:fld id="{F7021451-1387-4CA6-816F-3879F97B5CBC}" type="slidenum">
+              <a:rPr b="0" lang="en-US"/>
+              <a:t>15</a:t>
+            </a:fld>
+            <a:endParaRPr lang="en-US"/>
           </a:p>
         </p:txBody>
       </p:sp>
@@ -5463,8 +6115,8 @@
         </p:nvSpPr>
         <p:spPr>
           <a:xfrm>
-            <a:off x="548640" y="365760"/>
-            <a:ext cx="11091672" cy="914400"/>
+            <a:off x="548640" y="2011680"/>
+            <a:ext cx="11091672" cy="1737360"/>
           </a:xfrm>
           <a:prstGeom prst="rect">
             <a:avLst/>
@@ -5473,13 +6125,253 @@
           <a:ln/>
         </p:spPr>
         <p:txBody>
-          <a:bodyPr wrap="square" lIns="0" tIns="0" rIns="0" bIns="0" rtlCol="0" anchor="ctr"/>
+          <a:bodyPr wrap="square" lIns="0" tIns="0" rIns="0" bIns="0" rtlCol="0" anchor="t"/>
           <a:lstStyle/>
           <a:p>
             <a:pPr algn="l" indent="0" marL="0">
               <a:buNone/>
             </a:pPr>
             <a:r>
+              <a:rPr lang="en-US" sz="4400" b="1" dirty="0">
+                <a:solidFill>
+                  <a:schemeClr val="bg1"/>
+                </a:solidFill>
+              </a:rPr>
+              <a:t>Public data support far less than within-study numbers suggest</a:t>
+            </a:r>
+            <a:endParaRPr lang="en-US" sz="4400" dirty="0"/>
+          </a:p>
+        </p:txBody>
+      </p:sp>
+      <p:sp>
+        <p:nvSpPr>
+          <p:cNvPr id="3" name="Text 1"/>
+          <p:cNvSpPr txBox="1"/>
+          <p:nvPr/>
+        </p:nvSpPr>
+        <p:spPr>
+          <a:xfrm>
+            <a:off x="548640" y="3429000"/>
+            <a:ext cx="11091672" cy="2057400"/>
+          </a:xfrm>
+          <a:prstGeom prst="rect">
+            <a:avLst/>
+          </a:prstGeom>
+          <a:noFill/>
+          <a:ln/>
+        </p:spPr>
+        <p:txBody>
+          <a:bodyPr wrap="square" lIns="0" tIns="0" rIns="0" bIns="0" rtlCol="0" anchor="t"/>
+          <a:lstStyle/>
+          <a:p>
+            <a:pPr marL="342900" indent="-342900">
+              <a:spcAft>
+                <a:spcPts val="600"/>
+              </a:spcAft>
+              <a:buSzPct val="100000"/>
+              <a:buChar char="•"/>
+            </a:pPr>
+            <a:r>
+              <a:rPr lang="en-US" sz="2000" dirty="0">
+                <a:solidFill>
+                  <a:schemeClr val="bg1"/>
+                </a:solidFill>
+              </a:rPr>
+              <a:t>1 of 6 cross-study tests could be run; 2 of 3 eligible disorders were never tested across studies</a:t>
+            </a:r>
+            <a:endParaRPr lang="en-US" sz="2000" dirty="0"/>
+          </a:p>
+          <a:p>
+            <a:pPr marL="342900" indent="-342900">
+              <a:spcAft>
+                <a:spcPts val="600"/>
+              </a:spcAft>
+              <a:buSzPct val="100000"/>
+              <a:buChar char="•"/>
+            </a:pPr>
+            <a:r>
+              <a:rPr lang="en-US" sz="2000" dirty="0">
+                <a:solidFill>
+                  <a:schemeClr val="bg1"/>
+                </a:solidFill>
+              </a:rPr>
+              <a:t>Borrowed controls: 68.1% false positives on other disorders, against 11.9%</a:t>
+            </a:r>
+            <a:endParaRPr lang="en-US" sz="2000" dirty="0"/>
+          </a:p>
+          <a:p>
+            <a:pPr marL="342900" indent="-342900">
+              <a:spcAft>
+                <a:spcPts val="600"/>
+              </a:spcAft>
+              <a:buSzPct val="100000"/>
+              <a:buChar char="•"/>
+            </a:pPr>
+            <a:r>
+              <a:rPr lang="en-US" sz="2000" dirty="0">
+                <a:solidFill>
+                  <a:schemeClr val="bg1"/>
+                </a:solidFill>
+              </a:rPr>
+              <a:t>2 disorders have a between-study bound; both read "No evidence"</a:t>
+            </a:r>
+            <a:endParaRPr lang="en-US" sz="2000" dirty="0"/>
+          </a:p>
+          <a:p>
+            <a:pPr marL="342900" indent="-342900">
+              <a:spcAft>
+                <a:spcPts val="600"/>
+              </a:spcAft>
+              <a:buSzPct val="100000"/>
+              <a:buChar char="•"/>
+            </a:pPr>
+            <a:r>
+              <a:rPr lang="en-US" sz="2000" dirty="0">
+                <a:solidFill>
+                  <a:schemeClr val="bg1"/>
+                </a:solidFill>
+              </a:rPr>
+              <a:t>What the field needs: the same disorder from more than one site, with each site's own controls</a:t>
+            </a:r>
+            <a:endParaRPr lang="en-US" sz="2000" dirty="0"/>
+          </a:p>
+        </p:txBody>
+      </p:sp>
+      <p:sp>
+        <p:nvSpPr>
+          <p:cNvPr id="4" name="command panel"/>
+          <p:cNvSpPr/>
+          <p:nvPr/>
+        </p:nvSpPr>
+        <p:spPr>
+          <a:xfrm>
+            <a:off x="548640" y="5577840"/>
+            <a:ext cx="11091672" cy="777240"/>
+          </a:xfrm>
+          <a:prstGeom prst="roundRect">
+            <a:avLst>
+              <a:gd name="adj" fmla="val 9412"/>
+            </a:avLst>
+          </a:prstGeom>
+          <a:solidFill>
+            <a:schemeClr val="tx2"/>
+          </a:solidFill>
+          <a:ln w="12700">
+            <a:solidFill>
+              <a:schemeClr val="tx2"/>
+            </a:solidFill>
+            <a:prstDash val="solid"/>
+          </a:ln>
+        </p:spPr>
+      </p:sp>
+      <p:sp>
+        <p:nvSpPr>
+          <p:cNvPr id="5" name="Text 3"/>
+          <p:cNvSpPr txBox="1"/>
+          <p:nvPr/>
+        </p:nvSpPr>
+        <p:spPr>
+          <a:xfrm>
+            <a:off x="822960" y="5577840"/>
+            <a:ext cx="10543032" cy="777240"/>
+          </a:xfrm>
+          <a:prstGeom prst="rect">
+            <a:avLst/>
+          </a:prstGeom>
+          <a:noFill/>
+          <a:ln/>
+        </p:spPr>
+        <p:txBody>
+          <a:bodyPr wrap="square" lIns="0" tIns="0" rIns="0" bIns="0" rtlCol="0" anchor="ctr"/>
+          <a:lstStyle/>
+          <a:p>
+            <a:pPr indent="0" marL="0">
+              <a:buNone/>
+            </a:pPr>
+            <a:r>
+              <a:rPr lang="en-US" sz="2000" dirty="0">
+                <a:solidFill>
+                  <a:schemeClr val="bg1"/>
+                </a:solidFill>
+                <a:latin typeface="Courier New" pitchFamily="34" charset="0"/>
+                <a:ea typeface="Courier New" pitchFamily="34" charset="-122"/>
+                <a:cs typeface="Courier New" pitchFamily="34" charset="-120"/>
+              </a:rPr>
+              <a:t>python scripts/reproduce.py</a:t>
+            </a:r>
+            <a:endParaRPr lang="en-US" sz="2000" dirty="0"/>
+          </a:p>
+          <a:p>
+            <a:pPr indent="0" marL="0">
+              <a:buNone/>
+            </a:pPr>
+            <a:r>
+              <a:rPr lang="en-US" sz="2000" dirty="0">
+                <a:solidFill>
+                  <a:schemeClr val="bg1"/>
+                </a:solidFill>
+                <a:latin typeface="Courier New" pitchFamily="34" charset="0"/>
+                <a:ea typeface="Courier New" pitchFamily="34" charset="-122"/>
+                <a:cs typeface="Courier New" pitchFamily="34" charset="-120"/>
+              </a:rPr>
+              <a:t>github.com/cleverlyblue0009/EpiGrade</a:t>
+            </a:r>
+            <a:endParaRPr lang="en-US" sz="2000" dirty="0"/>
+          </a:p>
+        </p:txBody>
+      </p:sp>
+    </p:spTree>
+  </p:cSld>
+  <p:clrMapOvr>
+    <a:masterClrMapping/>
+  </p:clrMapOvr>
+</p:sld>
+</file>
+
+<file path=ppt/slides/slide17.xml><?xml version="1.0" encoding="utf-8"?>
+<p:sld xmlns:a="http://schemas.openxmlformats.org/drawingml/2006/main" xmlns:r="http://schemas.openxmlformats.org/officeDocument/2006/relationships" xmlns:p="http://schemas.openxmlformats.org/presentationml/2006/main">
+  <p:cSld name="Slide 17">
+    <p:spTree>
+      <p:nvGrpSpPr>
+        <p:cNvPr id="1" name=""/>
+        <p:cNvGrpSpPr/>
+        <p:nvPr/>
+      </p:nvGrpSpPr>
+      <p:grpSpPr>
+        <a:xfrm>
+          <a:off x="0" y="0"/>
+          <a:ext cx="0" cy="0"/>
+          <a:chOff x="0" y="0"/>
+          <a:chExt cx="0" cy="0"/>
+        </a:xfrm>
+      </p:grpSpPr>
+      <p:sp>
+        <p:nvSpPr>
+          <p:cNvPr id="2" name="Text 0"/>
+          <p:cNvSpPr/>
+          <p:nvPr>
+            <p:ph idx="100" type="title" hasCustomPrompt="1"/>
+          </p:nvPr>
+        </p:nvSpPr>
+        <p:spPr>
+          <a:xfrm>
+            <a:off x="548640" y="365760"/>
+            <a:ext cx="11091672" cy="914400"/>
+          </a:xfrm>
+          <a:prstGeom prst="rect">
+            <a:avLst/>
+          </a:prstGeom>
+          <a:noFill/>
+          <a:ln/>
+        </p:spPr>
+        <p:txBody>
+          <a:bodyPr wrap="square" lIns="0" tIns="0" rIns="0" bIns="0" rtlCol="0" anchor="ctr"/>
+          <a:lstStyle/>
+          <a:p>
+            <a:pPr algn="l" indent="0" marL="0">
+              <a:buNone/>
+            </a:pPr>
+            <a:r>
               <a:rPr lang="en-US" sz="3600" b="1" dirty="0">
                 <a:solidFill>
                   <a:schemeClr val="tx1"/>
@@ -5493,7 +6385,7 @@
       </p:sp>
       <p:graphicFrame>
         <p:nvGraphicFramePr>
-          <p:cNvPr id="17" name="methods table"/>
+          <p:cNvPr id="18" name="methods table"/>
           <p:cNvGraphicFramePr>
             <a:graphicFrameLocks noGrp="1"/>
           </p:cNvGraphicFramePr>
@@ -6428,7 +7320,7 @@
             <a:pPr algn="l"/>
             <a:fld id="{F7021451-1387-4CA6-816F-3879F97B5CBC}" type="slidenum">
               <a:rPr b="0" lang="en-US"/>
-              <a:t>16</a:t>
+              <a:t>17</a:t>
             </a:fld>
             <a:endParaRPr lang="en-US"/>
           </a:p>
@@ -11641,8 +12533,8 @@
         </p:nvSpPr>
         <p:spPr>
           <a:xfrm>
-            <a:off x="8412480" y="4206240"/>
-            <a:ext cx="3200400" cy="1920240"/>
+            <a:off x="8412480" y="4160520"/>
+            <a:ext cx="3200400" cy="2057400"/>
           </a:xfrm>
           <a:prstGeom prst="rect">
             <a:avLst/>
@@ -11663,7 +12555,7 @@
                   <a:schemeClr val="tx1"/>
                 </a:solidFill>
               </a:rPr>
-              <a:t>Transfer failure means a within-study result has not been shown to be about the disease.</a:t>
+              <a:t>We ran one cross-study test, not three: one disorder, one direction. 2 of 3 eligible disorders have no cross-study result at all.</a:t>
             </a:r>
             <a:endParaRPr lang="en-US" sz="2000" dirty="0"/>
           </a:p>

--- a/presentation/EpiGrade_slides.pptx
+++ b/presentation/EpiGrade_slides.pptx
@@ -22,9 +22,10 @@
     <p:sldId id="270" r:id="rId16"/>
     <p:sldId id="271" r:id="rId17"/>
     <p:sldId id="272" r:id="rId18"/>
+    <p:sldId id="273" r:id="rId19"/>
   </p:sldIdLst>
   <p:notesMasterIdLst>
-    <p:notesMasterId r:id="rId19"/>
+    <p:notesMasterId r:id="rId20"/>
   </p:notesMasterIdLst>
   <p:sldSz cx="12192000" cy="6858000"/>
   <p:notesSz cx="6858000" cy="12192000"/>
@@ -123,7 +124,7 @@
   <p:extLst>
     <p:ext uri="{521415D9-36F7-43E2-AB2F-B90AF26B5E84}">
       <p14:sectionLst xmlns:p14="http://schemas.microsoft.com/office/powerpoint/2010/main">
-        <p14:section name="The problem" id="{7537a7fa-7ad4-d722-e206-b2e5450fd9eb}">
+        <p14:section name="The problem" id="{73695f0a-b9be-6a75-5fc7-febc66124aa9}">
           <p14:sldIdLst>
             <p14:sldId id="256"/>
             <p14:sldId id="257"/>
@@ -131,14 +132,14 @@
             <p14:sldId id="259"/>
           </p14:sldIdLst>
         </p14:section>
-        <p14:section name="What we built" id="{904a8bb3-f2db-7946-ec8b-b4c1ad6152bb}">
+        <p14:section name="What we built" id="{48833006-f000-bb33-5f04-54bc9f6178e2}">
           <p14:sldIdLst>
             <p14:sldId id="260"/>
             <p14:sldId id="261"/>
             <p14:sldId id="262"/>
           </p14:sldIdLst>
         </p14:section>
-        <p14:section name="Findings" id="{96729480-2a5c-9ed3-6dbf-2930f62f9dba}">
+        <p14:section name="Findings" id="{3a55d995-3212-f408-8b63-adb4aa746bf3}">
           <p14:sldIdLst>
             <p14:sldId id="263"/>
             <p14:sldId id="264"/>
@@ -146,22 +147,23 @@
             <p14:sldId id="266"/>
           </p14:sldIdLst>
         </p14:section>
-        <p14:section name="Identification engine" id="{96405a75-17e8-0e4d-cc9b-9d4a768ffb94}">
+        <p14:section name="Identification engine" id="{85545681-6c40-c9b3-be76-d676f2068464}">
           <p14:sldIdLst>
             <p14:sldId id="267"/>
             <p14:sldId id="268"/>
+            <p14:sldId id="269"/>
           </p14:sldIdLst>
         </p14:section>
-        <p14:section name="Honest accounting" id="{993c2f5e-3d36-6672-848c-514542a758a2}">
+        <p14:section name="Honest accounting" id="{16194df5-5af4-11c8-d869-20969d1cc57f}">
           <p14:sldIdLst>
-            <p14:sldId id="269"/>
             <p14:sldId id="270"/>
+            <p14:sldId id="271"/>
           </p14:sldIdLst>
         </p14:section>
-        <p14:section name="Close" id="{baa2b1e0-de7e-dcaa-30b9-c7c94e3d31ec}">
+        <p14:section name="Close" id="{2cc62401-6e79-deef-a463-8c608f7e2be5}">
           <p14:sldIdLst>
-            <p14:sldId id="271"/>
             <p14:sldId id="272"/>
+            <p14:sldId id="273"/>
           </p14:sldIdLst>
         </p14:section>
       </p14:sectionLst>
@@ -1431,7 +1433,7 @@
           <a:p>
             <a:r>
               <a:rPr lang="en-US" dirty="0"/>
-              <a:t>We want to be exact about our contribution. The calibration method is not ours: it follows Pejaver and colleagues, and a general package already exists. Testing one disorder against another is routine inside the private database. Using a language model to read dataset labels has published benchmarks. What is ours is that every result can be regenerated from public data with one command, the audit itself, and the identification tool.</a:t>
+              <a:t>The app can add a plain-language summary to each result, written by a language model. We use the model only as a formatter: it gets a fact sheet built from our tables, and every output is checked before it is shown. Of 17 summaries, 12 passed first time, 4 needed one retry, and 1 fell back to a fixed template. But when every accepted summary was read through, 7 of 16 still contained a mistake of meaning, such as calling probes samples, so those are blocked. The point is that an automatic check catches invented numbers, not misreadings, and the app works fully without the model.</a:t>
             </a:r>
             <a:endParaRPr lang="en-US" dirty="0"/>
           </a:p>
@@ -1519,7 +1521,7 @@
           <a:p>
             <a:r>
               <a:rPr lang="en-US" dirty="0"/>
-              <a:t>We would rather tell you the weaknesses ourselves. Only one of six cross-study directions was computed, and it is based on only eighteen cases and six controls. We are not claiming that three disorders were tested across studies. Scores on a classifier's own disorder are optimistic, because the probes were chosen using those same samples. And our label check compares two computer-written rule sets, so a human review is still needed.</a:t>
+              <a:t>We want to be exact about our contribution. The calibration method is not ours: it follows Pejaver and colleagues, and a general package already exists. Testing one disorder against another is routine inside the private database. Using a language model to read dataset labels has published benchmarks. What is ours is that every result can be regenerated from public data with one command, the audit itself, and the identification tool.</a:t>
             </a:r>
             <a:endParaRPr lang="en-US" dirty="0"/>
           </a:p>
@@ -1607,7 +1609,7 @@
           <a:p>
             <a:r>
               <a:rPr lang="en-US" dirty="0"/>
-              <a:t>To conclude. Results measured inside one study look far stronger than public data can confirm. Only one cross-study test in six could be run, and two of the three eligible disorders were never tested across studies. Classifiers built with borrowed controls flagged about two thirds of unrelated patients. The fix is not a new method. It is data: the same disorder deposited by more than one site, each with its own controls. Everything we showed can be regenerated with the one command on this slide. Thank you.</a:t>
+              <a:t>We would rather tell you the weaknesses ourselves. Only one of six cross-study directions was computed, and it is based on only eighteen cases and six controls. We are not claiming that three disorders were tested across studies. Scores on a classifier's own disorder are optimistic, because the probes were chosen using those same samples. And our label check compares two computer-written rule sets, so a human review is still needed.</a:t>
             </a:r>
             <a:endParaRPr lang="en-US" dirty="0"/>
           </a:p>
@@ -1695,7 +1697,7 @@
           <a:p>
             <a:r>
               <a:rPr lang="en-US" dirty="0"/>
-              <a:t>This backup slide is for questions on method. The scoring rule is the published one: correlation with the case profile minus correlation with the control profile. Signatures use a Mann-Whitney test with a false discovery rate of five percent and a ten percent difference floor, and that threshold was changed exactly once. All data come from the Gene Expression Omnibus, a public archive, under the accession numbers listed here.</a:t>
+              <a:t>To conclude. Results measured inside one study look far stronger than public data can confirm. Only one cross-study test in six could be run, and two of the three eligible disorders were never tested across studies. Classifiers built with borrowed controls flagged about two thirds of unrelated patients. The fix is not a new method. It is data: the same disorder deposited by more than one site, each with its own controls. Everything we showed can be regenerated with the one command on this slide. Thank you.</a:t>
             </a:r>
             <a:endParaRPr lang="en-US" dirty="0"/>
           </a:p>
@@ -1719,6 +1721,94 @@
             <a:fld id="{F7021451-1387-4CA6-816F-3879F97B5CBC}" type="slidenum">
               <a:rPr lang="en-US"/>
               <a:t>17</a:t>
+            </a:fld>
+            <a:endParaRPr lang="en-US"/>
+          </a:p>
+        </p:txBody>
+      </p:sp>
+    </p:spTree>
+    <p:extLst>
+      <p:ext uri="{BB962C8B-B14F-4D97-AF65-F5344CB8AC3E}">
+        <p14:creationId xmlns:p14="http://schemas.microsoft.com/office/powerpoint/2010/main" val="1024086991"/>
+      </p:ext>
+    </p:extLst>
+  </p:cSld>
+  <p:clrMapOvr>
+    <a:masterClrMapping/>
+  </p:clrMapOvr>
+</p:notes>
+</file>
+
+<file path=ppt/notesSlides/notesSlide18.xml><?xml version="1.0" encoding="utf-8"?>
+<p:notes xmlns:a="http://schemas.openxmlformats.org/drawingml/2006/main" xmlns:r="http://schemas.openxmlformats.org/officeDocument/2006/relationships" xmlns:p="http://schemas.openxmlformats.org/presentationml/2006/main">
+  <p:cSld>
+    <p:spTree>
+      <p:nvGrpSpPr>
+        <p:cNvPr id="1" name=""/>
+        <p:cNvGrpSpPr/>
+        <p:nvPr/>
+      </p:nvGrpSpPr>
+      <p:grpSpPr>
+        <a:xfrm>
+          <a:off x="0" y="0"/>
+          <a:ext cx="0" cy="0"/>
+          <a:chOff x="0" y="0"/>
+          <a:chExt cx="0" cy="0"/>
+        </a:xfrm>
+      </p:grpSpPr>
+      <p:sp>
+        <p:nvSpPr>
+          <p:cNvPr id="2" name="Slide Image Placeholder 1"/>
+          <p:cNvSpPr>
+            <a:spLocks noGrp="1" noRot="1" noChangeAspect="1"/>
+          </p:cNvSpPr>
+          <p:nvPr>
+            <p:ph type="sldImg"/>
+          </p:nvPr>
+        </p:nvSpPr>
+        <p:spPr/>
+      </p:sp>
+      <p:sp>
+        <p:nvSpPr>
+          <p:cNvPr id="3" name="Notes Placeholder 2"/>
+          <p:cNvSpPr>
+            <a:spLocks noGrp="1"/>
+          </p:cNvSpPr>
+          <p:nvPr>
+            <p:ph type="body" idx="1"/>
+          </p:nvPr>
+        </p:nvSpPr>
+        <p:spPr/>
+        <p:txBody>
+          <a:bodyPr/>
+          <a:lstStyle/>
+          <a:p>
+            <a:r>
+              <a:rPr lang="en-US" dirty="0"/>
+              <a:t>This backup slide is for questions on method. The scoring rule is the published one: correlation with the case profile minus correlation with the control profile. Signatures use a Mann-Whitney test with a false discovery rate of five percent and a ten percent difference floor, and that threshold was changed exactly once. All data come from the Gene Expression Omnibus, a public archive, under the accession numbers listed here.</a:t>
+            </a:r>
+            <a:endParaRPr lang="en-US" dirty="0"/>
+          </a:p>
+        </p:txBody>
+      </p:sp>
+      <p:sp>
+        <p:nvSpPr>
+          <p:cNvPr id="4" name="Slide Number Placeholder 3"/>
+          <p:cNvSpPr>
+            <a:spLocks noGrp="1"/>
+          </p:cNvSpPr>
+          <p:nvPr>
+            <p:ph type="sldNum" sz="quarter" idx="10"/>
+          </p:nvPr>
+        </p:nvSpPr>
+        <p:spPr/>
+        <p:txBody>
+          <a:bodyPr/>
+          <a:lstStyle/>
+          <a:p>
+            <a:fld id="{F7021451-1387-4CA6-816F-3879F97B5CBC}" type="slidenum">
+              <a:rPr lang="en-US"/>
+              <a:t>18</a:t>
             </a:fld>
             <a:endParaRPr lang="en-US"/>
           </a:p>
@@ -5161,7 +5251,7 @@
                   <a:schemeClr val="tx1"/>
                 </a:solidFill>
               </a:rPr>
-              <a:t>What is ours and what is not</a:t>
+              <a:t>A language model as a formatter, checked</a:t>
             </a:r>
             <a:endParaRPr lang="en-US" sz="3600" dirty="0"/>
           </a:p>
@@ -5169,18 +5259,18 @@
       </p:sp>
       <p:sp>
         <p:nvSpPr>
-          <p:cNvPr id="3" name="Not ours panel"/>
+          <p:cNvPr id="3" name="stat summaries passed the automatic check first time"/>
           <p:cNvSpPr/>
           <p:nvPr/>
         </p:nvSpPr>
         <p:spPr>
           <a:xfrm>
-            <a:off x="548640" y="1508760"/>
-            <a:ext cx="5349240" cy="3703320"/>
+            <a:off x="548640" y="1463040"/>
+            <a:ext cx="3474720" cy="2103120"/>
           </a:xfrm>
           <a:prstGeom prst="roundRect">
             <a:avLst>
-              <a:gd name="adj" fmla="val 1975"/>
+              <a:gd name="adj" fmla="val 3478"/>
             </a:avLst>
           </a:prstGeom>
           <a:solidFill>
@@ -5196,39 +5286,14 @@
       </p:sp>
       <p:sp>
         <p:nvSpPr>
-          <p:cNvPr id="4" name="Not ours marker"/>
-          <p:cNvSpPr/>
-          <p:nvPr/>
-        </p:nvSpPr>
-        <p:spPr>
-          <a:xfrm>
-            <a:off x="868680" y="1783080"/>
-            <a:ext cx="457200" cy="457200"/>
-          </a:xfrm>
-          <a:prstGeom prst="ellipse">
-            <a:avLst/>
-          </a:prstGeom>
-          <a:solidFill>
-            <a:schemeClr val="accent4"/>
-          </a:solidFill>
-          <a:ln w="12700">
-            <a:solidFill>
-              <a:schemeClr val="accent4"/>
-            </a:solidFill>
-            <a:prstDash val="solid"/>
-          </a:ln>
-        </p:spPr>
-      </p:sp>
-      <p:sp>
-        <p:nvSpPr>
-          <p:cNvPr id="5" name="Text 3"/>
+          <p:cNvPr id="4" name="Text 2"/>
           <p:cNvSpPr txBox="1"/>
           <p:nvPr/>
         </p:nvSpPr>
         <p:spPr>
           <a:xfrm>
-            <a:off x="1508760" y="1755648"/>
-            <a:ext cx="4023360" cy="502920"/>
+            <a:off x="777240" y="1600200"/>
+            <a:ext cx="3017520" cy="1005840"/>
           </a:xfrm>
           <a:prstGeom prst="rect">
             <a:avLst/>
@@ -5237,34 +5302,37 @@
           <a:ln/>
         </p:spPr>
         <p:txBody>
-          <a:bodyPr wrap="square" lIns="0" tIns="0" rIns="0" bIns="0" rtlCol="0" anchor="ctr"/>
+          <a:bodyPr wrap="square" lIns="0" tIns="0" rIns="0" bIns="0" rtlCol="0" anchor="t"/>
           <a:lstStyle/>
           <a:p>
             <a:pPr indent="0" marL="0">
               <a:buNone/>
             </a:pPr>
             <a:r>
-              <a:rPr lang="en-US" sz="2600" b="1" dirty="0">
-                <a:solidFill>
-                  <a:schemeClr val="tx1"/>
-                </a:solidFill>
+              <a:rPr lang="en-US" sz="5400" b="1" dirty="0">
+                <a:solidFill>
+                  <a:schemeClr val="accent1"/>
+                </a:solidFill>
+                <a:latin typeface="Cambria" pitchFamily="34" charset="0"/>
+                <a:ea typeface="Cambria" pitchFamily="34" charset="-122"/>
+                <a:cs typeface="Cambria" pitchFamily="34" charset="-120"/>
               </a:rPr>
-              <a:t>Not ours</a:t>
-            </a:r>
-            <a:endParaRPr lang="en-US" sz="2600" dirty="0"/>
-          </a:p>
-        </p:txBody>
-      </p:sp>
-      <p:sp>
-        <p:nvSpPr>
-          <p:cNvPr id="6" name="Text 4"/>
+              <a:t>12 of 17</a:t>
+            </a:r>
+            <a:endParaRPr lang="en-US" sz="5400" dirty="0"/>
+          </a:p>
+        </p:txBody>
+      </p:sp>
+      <p:sp>
+        <p:nvSpPr>
+          <p:cNvPr id="5" name="Text 3"/>
           <p:cNvSpPr txBox="1"/>
           <p:nvPr/>
         </p:nvSpPr>
         <p:spPr>
           <a:xfrm>
-            <a:off x="868680" y="2514600"/>
-            <a:ext cx="4709160" cy="2560320"/>
+            <a:off x="777240" y="2606040"/>
+            <a:ext cx="3017520" cy="868680"/>
           </a:xfrm>
           <a:prstGeom prst="rect">
             <a:avLst/>
@@ -5276,75 +5344,35 @@
           <a:bodyPr wrap="square" lIns="0" tIns="0" rIns="0" bIns="0" rtlCol="0" anchor="t"/>
           <a:lstStyle/>
           <a:p>
-            <a:pPr marL="342900" indent="-342900">
-              <a:spcAft>
-                <a:spcPts val="1200"/>
-              </a:spcAft>
-              <a:buSzPct val="100000"/>
-              <a:buChar char="•"/>
+            <a:pPr indent="0" marL="0">
+              <a:buNone/>
             </a:pPr>
             <a:r>
               <a:rPr lang="en-US" sz="2000" dirty="0">
                 <a:solidFill>
-                  <a:schemeClr val="tx1"/>
+                  <a:schemeClr val="tx2"/>
                 </a:solidFill>
               </a:rPr>
-              <a:t>The calibration method (Pejaver 2022; a general tool is on CRAN)</a:t>
+              <a:t>summaries passed the automatic check first time</a:t>
             </a:r>
             <a:endParaRPr lang="en-US" sz="2000" dirty="0"/>
           </a:p>
-          <a:p>
-            <a:pPr marL="342900" indent="-342900">
-              <a:spcAft>
-                <a:spcPts val="1200"/>
-              </a:spcAft>
-              <a:buSzPct val="100000"/>
-              <a:buChar char="•"/>
-            </a:pPr>
-            <a:r>
-              <a:rPr lang="en-US" sz="2000" dirty="0">
-                <a:solidFill>
-                  <a:schemeClr val="tx1"/>
-                </a:solidFill>
-              </a:rPr>
-              <a:t>Testing one disorder against another (routine inside the private database)</a:t>
-            </a:r>
-            <a:endParaRPr lang="en-US" sz="2000" dirty="0"/>
-          </a:p>
-          <a:p>
-            <a:pPr marL="342900" indent="-342900">
-              <a:spcAft>
-                <a:spcPts val="1200"/>
-              </a:spcAft>
-              <a:buSzPct val="100000"/>
-              <a:buChar char="•"/>
-            </a:pPr>
-            <a:r>
-              <a:rPr lang="en-US" sz="2000" dirty="0">
-                <a:solidFill>
-                  <a:schemeClr val="tx1"/>
-                </a:solidFill>
-              </a:rPr>
-              <a:t>Using a language model to read dataset labels (published benchmarks exist)</a:t>
-            </a:r>
-            <a:endParaRPr lang="en-US" sz="2000" dirty="0"/>
-          </a:p>
-        </p:txBody>
-      </p:sp>
-      <p:sp>
-        <p:nvSpPr>
-          <p:cNvPr id="7" name="Ours panel"/>
+        </p:txBody>
+      </p:sp>
+      <p:sp>
+        <p:nvSpPr>
+          <p:cNvPr id="6" name="stat passed after one retry, and fell back to a fixed template"/>
           <p:cNvSpPr/>
           <p:nvPr/>
         </p:nvSpPr>
         <p:spPr>
           <a:xfrm>
-            <a:off x="6172200" y="1508760"/>
-            <a:ext cx="5349240" cy="3703320"/>
+            <a:off x="4297680" y="1463040"/>
+            <a:ext cx="3474720" cy="2103120"/>
           </a:xfrm>
           <a:prstGeom prst="roundRect">
             <a:avLst>
-              <a:gd name="adj" fmla="val 1975"/>
+              <a:gd name="adj" fmla="val 3478"/>
             </a:avLst>
           </a:prstGeom>
           <a:solidFill>
@@ -5360,24 +5388,101 @@
       </p:sp>
       <p:sp>
         <p:nvSpPr>
-          <p:cNvPr id="8" name="Ours marker"/>
+          <p:cNvPr id="7" name="Text 5"/>
+          <p:cNvSpPr txBox="1"/>
+          <p:nvPr/>
+        </p:nvSpPr>
+        <p:spPr>
+          <a:xfrm>
+            <a:off x="4526280" y="1600200"/>
+            <a:ext cx="3017520" cy="1005840"/>
+          </a:xfrm>
+          <a:prstGeom prst="rect">
+            <a:avLst/>
+          </a:prstGeom>
+          <a:noFill/>
+          <a:ln/>
+        </p:spPr>
+        <p:txBody>
+          <a:bodyPr wrap="square" lIns="0" tIns="0" rIns="0" bIns="0" rtlCol="0" anchor="t"/>
+          <a:lstStyle/>
+          <a:p>
+            <a:pPr indent="0" marL="0">
+              <a:buNone/>
+            </a:pPr>
+            <a:r>
+              <a:rPr lang="en-US" sz="5400" b="1" dirty="0">
+                <a:solidFill>
+                  <a:schemeClr val="accent5"/>
+                </a:solidFill>
+                <a:latin typeface="Cambria" pitchFamily="34" charset="0"/>
+                <a:ea typeface="Cambria" pitchFamily="34" charset="-122"/>
+                <a:cs typeface="Cambria" pitchFamily="34" charset="-120"/>
+              </a:rPr>
+              <a:t>4 + 1</a:t>
+            </a:r>
+            <a:endParaRPr lang="en-US" sz="5400" dirty="0"/>
+          </a:p>
+        </p:txBody>
+      </p:sp>
+      <p:sp>
+        <p:nvSpPr>
+          <p:cNvPr id="8" name="Text 6"/>
+          <p:cNvSpPr txBox="1"/>
+          <p:nvPr/>
+        </p:nvSpPr>
+        <p:spPr>
+          <a:xfrm>
+            <a:off x="4526280" y="2606040"/>
+            <a:ext cx="3017520" cy="868680"/>
+          </a:xfrm>
+          <a:prstGeom prst="rect">
+            <a:avLst/>
+          </a:prstGeom>
+          <a:noFill/>
+          <a:ln/>
+        </p:spPr>
+        <p:txBody>
+          <a:bodyPr wrap="square" lIns="0" tIns="0" rIns="0" bIns="0" rtlCol="0" anchor="t"/>
+          <a:lstStyle/>
+          <a:p>
+            <a:pPr indent="0" marL="0">
+              <a:buNone/>
+            </a:pPr>
+            <a:r>
+              <a:rPr lang="en-US" sz="2000" dirty="0">
+                <a:solidFill>
+                  <a:schemeClr val="tx2"/>
+                </a:solidFill>
+              </a:rPr>
+              <a:t>passed after one retry, and fell back to a fixed template</a:t>
+            </a:r>
+            <a:endParaRPr lang="en-US" sz="2000" dirty="0"/>
+          </a:p>
+        </p:txBody>
+      </p:sp>
+      <p:sp>
+        <p:nvSpPr>
+          <p:cNvPr id="9" name="stat accepted summaries were still wrong on review, and are blocked"/>
           <p:cNvSpPr/>
           <p:nvPr/>
         </p:nvSpPr>
         <p:spPr>
           <a:xfrm>
-            <a:off x="6492240" y="1783080"/>
-            <a:ext cx="457200" cy="457200"/>
-          </a:xfrm>
-          <a:prstGeom prst="ellipse">
-            <a:avLst/>
+            <a:off x="8046720" y="1463040"/>
+            <a:ext cx="3474720" cy="2103120"/>
+          </a:xfrm>
+          <a:prstGeom prst="roundRect">
+            <a:avLst>
+              <a:gd name="adj" fmla="val 3478"/>
+            </a:avLst>
           </a:prstGeom>
           <a:solidFill>
-            <a:schemeClr val="accent1"/>
+            <a:schemeClr val="bg2"/>
           </a:solidFill>
           <a:ln w="12700">
             <a:solidFill>
-              <a:schemeClr val="accent1"/>
+              <a:schemeClr val="bg2"/>
             </a:solidFill>
             <a:prstDash val="solid"/>
           </a:ln>
@@ -5385,14 +5490,14 @@
       </p:sp>
       <p:sp>
         <p:nvSpPr>
-          <p:cNvPr id="9" name="Text 7"/>
+          <p:cNvPr id="10" name="Text 8"/>
           <p:cNvSpPr txBox="1"/>
           <p:nvPr/>
         </p:nvSpPr>
         <p:spPr>
           <a:xfrm>
-            <a:off x="7132320" y="1755648"/>
-            <a:ext cx="4023360" cy="502920"/>
+            <a:off x="8275320" y="1600200"/>
+            <a:ext cx="3017520" cy="1005840"/>
           </a:xfrm>
           <a:prstGeom prst="rect">
             <a:avLst/>
@@ -5401,97 +5506,24 @@
           <a:ln/>
         </p:spPr>
         <p:txBody>
-          <a:bodyPr wrap="square" lIns="0" tIns="0" rIns="0" bIns="0" rtlCol="0" anchor="ctr"/>
+          <a:bodyPr wrap="square" lIns="0" tIns="0" rIns="0" bIns="0" rtlCol="0" anchor="t"/>
           <a:lstStyle/>
           <a:p>
             <a:pPr indent="0" marL="0">
               <a:buNone/>
             </a:pPr>
             <a:r>
-              <a:rPr lang="en-US" sz="2600" b="1" dirty="0">
-                <a:solidFill>
-                  <a:schemeClr val="tx1"/>
-                </a:solidFill>
+              <a:rPr lang="en-US" sz="5400" b="1" dirty="0">
+                <a:solidFill>
+                  <a:schemeClr val="accent6"/>
+                </a:solidFill>
+                <a:latin typeface="Cambria" pitchFamily="34" charset="0"/>
+                <a:ea typeface="Cambria" pitchFamily="34" charset="-122"/>
+                <a:cs typeface="Cambria" pitchFamily="34" charset="-120"/>
               </a:rPr>
-              <a:t>Ours</a:t>
-            </a:r>
-            <a:endParaRPr lang="en-US" sz="2600" dirty="0"/>
-          </a:p>
-        </p:txBody>
-      </p:sp>
-      <p:sp>
-        <p:nvSpPr>
-          <p:cNvPr id="10" name="Text 8"/>
-          <p:cNvSpPr txBox="1"/>
-          <p:nvPr/>
-        </p:nvSpPr>
-        <p:spPr>
-          <a:xfrm>
-            <a:off x="6492240" y="2514600"/>
-            <a:ext cx="4709160" cy="2560320"/>
-          </a:xfrm>
-          <a:prstGeom prst="rect">
-            <a:avLst/>
-          </a:prstGeom>
-          <a:noFill/>
-          <a:ln/>
-        </p:spPr>
-        <p:txBody>
-          <a:bodyPr wrap="square" lIns="0" tIns="0" rIns="0" bIns="0" rtlCol="0" anchor="t"/>
-          <a:lstStyle/>
-          <a:p>
-            <a:pPr marL="342900" indent="-342900">
-              <a:spcAft>
-                <a:spcPts val="1200"/>
-              </a:spcAft>
-              <a:buSzPct val="100000"/>
-              <a:buChar char="•"/>
-            </a:pPr>
-            <a:r>
-              <a:rPr lang="en-US" sz="2000" dirty="0">
-                <a:solidFill>
-                  <a:schemeClr val="tx1"/>
-                </a:solidFill>
-              </a:rPr>
-              <a:t>Every result regenerated from public data by one command</a:t>
-            </a:r>
-            <a:endParaRPr lang="en-US" sz="2000" dirty="0"/>
-          </a:p>
-          <a:p>
-            <a:pPr marL="342900" indent="-342900">
-              <a:spcAft>
-                <a:spcPts val="1200"/>
-              </a:spcAft>
-              <a:buSzPct val="100000"/>
-              <a:buChar char="•"/>
-            </a:pPr>
-            <a:r>
-              <a:rPr lang="en-US" sz="2000" dirty="0">
-                <a:solidFill>
-                  <a:schemeClr val="tx1"/>
-                </a:solidFill>
-              </a:rPr>
-              <a:t>The audit: 12 verdicts, 6 cross-study attempts, a full 12 by 13 matrix</a:t>
-            </a:r>
-            <a:endParaRPr lang="en-US" sz="2000" dirty="0"/>
-          </a:p>
-          <a:p>
-            <a:pPr marL="342900" indent="-342900">
-              <a:spcAft>
-                <a:spcPts val="1200"/>
-              </a:spcAft>
-              <a:buSzPct val="100000"/>
-              <a:buChar char="•"/>
-            </a:pPr>
-            <a:r>
-              <a:rPr lang="en-US" sz="2000" dirty="0">
-                <a:solidFill>
-                  <a:schemeClr val="tx1"/>
-                </a:solidFill>
-              </a:rPr>
-              <a:t>The identification engine with its random-probe control</a:t>
-            </a:r>
-            <a:endParaRPr lang="en-US" sz="2000" dirty="0"/>
+              <a:t>7 of 16</a:t>
+            </a:r>
+            <a:endParaRPr lang="en-US" sz="5400" dirty="0"/>
           </a:p>
         </p:txBody>
       </p:sp>
@@ -5503,8 +5535,8 @@
         </p:nvSpPr>
         <p:spPr>
           <a:xfrm>
-            <a:off x="548640" y="5486400"/>
-            <a:ext cx="11091672" cy="548640"/>
+            <a:off x="8275320" y="2606040"/>
+            <a:ext cx="3017520" cy="868680"/>
           </a:xfrm>
           <a:prstGeom prst="rect">
             <a:avLst/>
@@ -5520,14 +5552,70 @@
               <a:buNone/>
             </a:pPr>
             <a:r>
-              <a:rPr lang="en-US" sz="2400" b="1" dirty="0">
-                <a:solidFill>
-                  <a:schemeClr val="accent5"/>
+              <a:rPr lang="en-US" sz="2000" dirty="0">
+                <a:solidFill>
+                  <a:schemeClr val="tx2"/>
                 </a:solidFill>
               </a:rPr>
-              <a:t>Our claim is that this can be checked, not that the methods are new.</a:t>
-            </a:r>
-            <a:endParaRPr lang="en-US" sz="2400" dirty="0"/>
+              <a:t>accepted summaries were still wrong on review, and are blocked</a:t>
+            </a:r>
+            <a:endParaRPr lang="en-US" sz="2000" dirty="0"/>
+          </a:p>
+        </p:txBody>
+      </p:sp>
+      <p:sp>
+        <p:nvSpPr>
+          <p:cNvPr id="12" name="Text 10"/>
+          <p:cNvSpPr txBox="1"/>
+          <p:nvPr/>
+        </p:nvSpPr>
+        <p:spPr>
+          <a:xfrm>
+            <a:off x="548640" y="3886200"/>
+            <a:ext cx="11091672" cy="2286000"/>
+          </a:xfrm>
+          <a:prstGeom prst="rect">
+            <a:avLst/>
+          </a:prstGeom>
+          <a:noFill/>
+          <a:ln/>
+        </p:spPr>
+        <p:txBody>
+          <a:bodyPr wrap="square" lIns="0" tIns="0" rIns="0" bIns="0" rtlCol="0" anchor="t"/>
+          <a:lstStyle/>
+          <a:p>
+            <a:pPr indent="0" marL="0">
+              <a:spcAft>
+                <a:spcPts val="1000"/>
+              </a:spcAft>
+              <a:buNone/>
+            </a:pPr>
+            <a:r>
+              <a:rPr lang="en-US" sz="2000" dirty="0">
+                <a:solidFill>
+                  <a:schemeClr val="tx1"/>
+                </a:solidFill>
+              </a:rPr>
+              <a:t>The model only restates a fact sheet built from our tables. Any number not in it, any clinical or mechanistic word, or a wrong term means rejection.</a:t>
+            </a:r>
+            <a:endParaRPr lang="en-US" sz="2000" dirty="0"/>
+          </a:p>
+          <a:p>
+            <a:pPr indent="0" marL="0">
+              <a:spcAft>
+                <a:spcPts val="1000"/>
+              </a:spcAft>
+              <a:buNone/>
+            </a:pPr>
+            <a:r>
+              <a:rPr lang="en-US" sz="2000" b="1" dirty="0">
+                <a:solidFill>
+                  <a:schemeClr val="tx1"/>
+                </a:solidFill>
+              </a:rPr>
+              <a:t>Passing that check is not the same as being right: it misses errors of meaning. The review was done by an AI assistant, not a person.</a:t>
+            </a:r>
+            <a:endParaRPr lang="en-US" sz="2000" dirty="0"/>
           </a:p>
         </p:txBody>
       </p:sp>
@@ -5633,7 +5721,7 @@
                   <a:schemeClr val="tx1"/>
                 </a:solidFill>
               </a:rPr>
-              <a:t>Limitations, before you ask</a:t>
+              <a:t>What is ours and what is not</a:t>
             </a:r>
             <a:endParaRPr lang="en-US" sz="3600" dirty="0"/>
           </a:p>
@@ -5641,18 +5729,18 @@
       </p:sp>
       <p:sp>
         <p:nvSpPr>
-          <p:cNvPr id="3" name="limitation 1"/>
+          <p:cNvPr id="3" name="Not ours panel"/>
           <p:cNvSpPr/>
           <p:nvPr/>
         </p:nvSpPr>
         <p:spPr>
           <a:xfrm>
             <a:off x="548640" y="1508760"/>
-            <a:ext cx="5349240" cy="2148840"/>
+            <a:ext cx="5349240" cy="3703320"/>
           </a:xfrm>
           <a:prstGeom prst="roundRect">
             <a:avLst>
-              <a:gd name="adj" fmla="val 3404"/>
+              <a:gd name="adj" fmla="val 1975"/>
             </a:avLst>
           </a:prstGeom>
           <a:solidFill>
@@ -5668,14 +5756,39 @@
       </p:sp>
       <p:sp>
         <p:nvSpPr>
-          <p:cNvPr id="4" name="Text 2"/>
+          <p:cNvPr id="4" name="Not ours marker"/>
+          <p:cNvSpPr/>
+          <p:nvPr/>
+        </p:nvSpPr>
+        <p:spPr>
+          <a:xfrm>
+            <a:off x="868680" y="1783080"/>
+            <a:ext cx="457200" cy="457200"/>
+          </a:xfrm>
+          <a:prstGeom prst="ellipse">
+            <a:avLst/>
+          </a:prstGeom>
+          <a:solidFill>
+            <a:schemeClr val="accent4"/>
+          </a:solidFill>
+          <a:ln w="12700">
+            <a:solidFill>
+              <a:schemeClr val="accent4"/>
+            </a:solidFill>
+            <a:prstDash val="solid"/>
+          </a:ln>
+        </p:spPr>
+      </p:sp>
+      <p:sp>
+        <p:nvSpPr>
+          <p:cNvPr id="5" name="Text 3"/>
           <p:cNvSpPr txBox="1"/>
           <p:nvPr/>
         </p:nvSpPr>
         <p:spPr>
           <a:xfrm>
-            <a:off x="868680" y="1737360"/>
-            <a:ext cx="4709160" cy="457200"/>
+            <a:off x="1508760" y="1755648"/>
+            <a:ext cx="4023360" cy="502920"/>
           </a:xfrm>
           <a:prstGeom prst="rect">
             <a:avLst/>
@@ -5684,34 +5797,34 @@
           <a:ln/>
         </p:spPr>
         <p:txBody>
-          <a:bodyPr wrap="square" lIns="0" tIns="0" rIns="0" bIns="0" rtlCol="0" anchor="t"/>
+          <a:bodyPr wrap="square" lIns="0" tIns="0" rIns="0" bIns="0" rtlCol="0" anchor="ctr"/>
           <a:lstStyle/>
           <a:p>
             <a:pPr indent="0" marL="0">
               <a:buNone/>
             </a:pPr>
             <a:r>
-              <a:rPr lang="en-US" sz="2400" b="1" dirty="0">
-                <a:solidFill>
-                  <a:schemeClr val="accent6"/>
+              <a:rPr lang="en-US" sz="2600" b="1" dirty="0">
+                <a:solidFill>
+                  <a:schemeClr val="tx1"/>
                 </a:solidFill>
               </a:rPr>
-              <a:t>Small numbers</a:t>
-            </a:r>
-            <a:endParaRPr lang="en-US" sz="2400" dirty="0"/>
-          </a:p>
-        </p:txBody>
-      </p:sp>
-      <p:sp>
-        <p:nvSpPr>
-          <p:cNvPr id="5" name="Text 3"/>
+              <a:t>Not ours</a:t>
+            </a:r>
+            <a:endParaRPr lang="en-US" sz="2600" dirty="0"/>
+          </a:p>
+        </p:txBody>
+      </p:sp>
+      <p:sp>
+        <p:nvSpPr>
+          <p:cNvPr id="6" name="Text 4"/>
           <p:cNvSpPr txBox="1"/>
           <p:nvPr/>
         </p:nvSpPr>
         <p:spPr>
           <a:xfrm>
-            <a:off x="868680" y="2286000"/>
-            <a:ext cx="4709160" cy="1280160"/>
+            <a:off x="868680" y="2514600"/>
+            <a:ext cx="4709160" cy="2560320"/>
           </a:xfrm>
           <a:prstGeom prst="rect">
             <a:avLst/>
@@ -5723,35 +5836,75 @@
           <a:bodyPr wrap="square" lIns="0" tIns="0" rIns="0" bIns="0" rtlCol="0" anchor="t"/>
           <a:lstStyle/>
           <a:p>
-            <a:pPr indent="0" marL="0">
-              <a:buNone/>
+            <a:pPr marL="342900" indent="-342900">
+              <a:spcAft>
+                <a:spcPts val="1200"/>
+              </a:spcAft>
+              <a:buSzPct val="100000"/>
+              <a:buChar char="•"/>
             </a:pPr>
             <a:r>
               <a:rPr lang="en-US" sz="2000" dirty="0">
                 <a:solidFill>
-                  <a:schemeClr val="tx2"/>
+                  <a:schemeClr val="tx1"/>
                 </a:solidFill>
               </a:rPr>
-              <a:t>That one cross-study result rests on 18 cases and 6 controls.</a:t>
+              <a:t>The calibration method (Pejaver 2022; a general tool is on CRAN)</a:t>
             </a:r>
             <a:endParaRPr lang="en-US" sz="2000" dirty="0"/>
           </a:p>
-        </p:txBody>
-      </p:sp>
-      <p:sp>
-        <p:nvSpPr>
-          <p:cNvPr id="6" name="limitation 2"/>
+          <a:p>
+            <a:pPr marL="342900" indent="-342900">
+              <a:spcAft>
+                <a:spcPts val="1200"/>
+              </a:spcAft>
+              <a:buSzPct val="100000"/>
+              <a:buChar char="•"/>
+            </a:pPr>
+            <a:r>
+              <a:rPr lang="en-US" sz="2000" dirty="0">
+                <a:solidFill>
+                  <a:schemeClr val="tx1"/>
+                </a:solidFill>
+              </a:rPr>
+              <a:t>Testing one disorder against another (routine inside the private database)</a:t>
+            </a:r>
+            <a:endParaRPr lang="en-US" sz="2000" dirty="0"/>
+          </a:p>
+          <a:p>
+            <a:pPr marL="342900" indent="-342900">
+              <a:spcAft>
+                <a:spcPts val="1200"/>
+              </a:spcAft>
+              <a:buSzPct val="100000"/>
+              <a:buChar char="•"/>
+            </a:pPr>
+            <a:r>
+              <a:rPr lang="en-US" sz="2000" dirty="0">
+                <a:solidFill>
+                  <a:schemeClr val="tx1"/>
+                </a:solidFill>
+              </a:rPr>
+              <a:t>Using a language model to read dataset labels (published benchmarks exist)</a:t>
+            </a:r>
+            <a:endParaRPr lang="en-US" sz="2000" dirty="0"/>
+          </a:p>
+        </p:txBody>
+      </p:sp>
+      <p:sp>
+        <p:nvSpPr>
+          <p:cNvPr id="7" name="Ours panel"/>
           <p:cNvSpPr/>
           <p:nvPr/>
         </p:nvSpPr>
         <p:spPr>
           <a:xfrm>
             <a:off x="6172200" y="1508760"/>
-            <a:ext cx="5349240" cy="2148840"/>
+            <a:ext cx="5349240" cy="3703320"/>
           </a:xfrm>
           <a:prstGeom prst="roundRect">
             <a:avLst>
-              <a:gd name="adj" fmla="val 3404"/>
+              <a:gd name="adj" fmla="val 1975"/>
             </a:avLst>
           </a:prstGeom>
           <a:solidFill>
@@ -5767,14 +5920,39 @@
       </p:sp>
       <p:sp>
         <p:nvSpPr>
-          <p:cNvPr id="7" name="Text 5"/>
+          <p:cNvPr id="8" name="Ours marker"/>
+          <p:cNvSpPr/>
+          <p:nvPr/>
+        </p:nvSpPr>
+        <p:spPr>
+          <a:xfrm>
+            <a:off x="6492240" y="1783080"/>
+            <a:ext cx="457200" cy="457200"/>
+          </a:xfrm>
+          <a:prstGeom prst="ellipse">
+            <a:avLst/>
+          </a:prstGeom>
+          <a:solidFill>
+            <a:schemeClr val="accent1"/>
+          </a:solidFill>
+          <a:ln w="12700">
+            <a:solidFill>
+              <a:schemeClr val="accent1"/>
+            </a:solidFill>
+            <a:prstDash val="solid"/>
+          </a:ln>
+        </p:spPr>
+      </p:sp>
+      <p:sp>
+        <p:nvSpPr>
+          <p:cNvPr id="9" name="Text 7"/>
           <p:cNvSpPr txBox="1"/>
           <p:nvPr/>
         </p:nvSpPr>
         <p:spPr>
           <a:xfrm>
-            <a:off x="6492240" y="1737360"/>
-            <a:ext cx="4709160" cy="457200"/>
+            <a:off x="7132320" y="1755648"/>
+            <a:ext cx="4023360" cy="502920"/>
           </a:xfrm>
           <a:prstGeom prst="rect">
             <a:avLst/>
@@ -5783,34 +5961,110 @@
           <a:ln/>
         </p:spPr>
         <p:txBody>
-          <a:bodyPr wrap="square" lIns="0" tIns="0" rIns="0" bIns="0" rtlCol="0" anchor="t"/>
+          <a:bodyPr wrap="square" lIns="0" tIns="0" rIns="0" bIns="0" rtlCol="0" anchor="ctr"/>
           <a:lstStyle/>
           <a:p>
             <a:pPr indent="0" marL="0">
               <a:buNone/>
             </a:pPr>
             <a:r>
-              <a:rPr lang="en-US" sz="2400" b="1" dirty="0">
-                <a:solidFill>
-                  <a:schemeClr val="accent6"/>
+              <a:rPr lang="en-US" sz="2600" b="1" dirty="0">
+                <a:solidFill>
+                  <a:schemeClr val="tx1"/>
                 </a:solidFill>
               </a:rPr>
-              <a:t>One cross-study test</a:t>
-            </a:r>
-            <a:endParaRPr lang="en-US" sz="2400" dirty="0"/>
-          </a:p>
-        </p:txBody>
-      </p:sp>
-      <p:sp>
-        <p:nvSpPr>
-          <p:cNvPr id="8" name="Text 6"/>
+              <a:t>Ours</a:t>
+            </a:r>
+            <a:endParaRPr lang="en-US" sz="2600" dirty="0"/>
+          </a:p>
+        </p:txBody>
+      </p:sp>
+      <p:sp>
+        <p:nvSpPr>
+          <p:cNvPr id="10" name="Text 8"/>
           <p:cNvSpPr txBox="1"/>
           <p:nvPr/>
         </p:nvSpPr>
         <p:spPr>
           <a:xfrm>
-            <a:off x="6492240" y="2286000"/>
-            <a:ext cx="4709160" cy="1280160"/>
+            <a:off x="6492240" y="2514600"/>
+            <a:ext cx="4709160" cy="2560320"/>
+          </a:xfrm>
+          <a:prstGeom prst="rect">
+            <a:avLst/>
+          </a:prstGeom>
+          <a:noFill/>
+          <a:ln/>
+        </p:spPr>
+        <p:txBody>
+          <a:bodyPr wrap="square" lIns="0" tIns="0" rIns="0" bIns="0" rtlCol="0" anchor="t"/>
+          <a:lstStyle/>
+          <a:p>
+            <a:pPr marL="342900" indent="-342900">
+              <a:spcAft>
+                <a:spcPts val="1200"/>
+              </a:spcAft>
+              <a:buSzPct val="100000"/>
+              <a:buChar char="•"/>
+            </a:pPr>
+            <a:r>
+              <a:rPr lang="en-US" sz="2000" dirty="0">
+                <a:solidFill>
+                  <a:schemeClr val="tx1"/>
+                </a:solidFill>
+              </a:rPr>
+              <a:t>Every result regenerated from public data by one command</a:t>
+            </a:r>
+            <a:endParaRPr lang="en-US" sz="2000" dirty="0"/>
+          </a:p>
+          <a:p>
+            <a:pPr marL="342900" indent="-342900">
+              <a:spcAft>
+                <a:spcPts val="1200"/>
+              </a:spcAft>
+              <a:buSzPct val="100000"/>
+              <a:buChar char="•"/>
+            </a:pPr>
+            <a:r>
+              <a:rPr lang="en-US" sz="2000" dirty="0">
+                <a:solidFill>
+                  <a:schemeClr val="tx1"/>
+                </a:solidFill>
+              </a:rPr>
+              <a:t>The audit: 12 verdicts, 6 cross-study attempts, a full 12 by 13 matrix</a:t>
+            </a:r>
+            <a:endParaRPr lang="en-US" sz="2000" dirty="0"/>
+          </a:p>
+          <a:p>
+            <a:pPr marL="342900" indent="-342900">
+              <a:spcAft>
+                <a:spcPts val="1200"/>
+              </a:spcAft>
+              <a:buSzPct val="100000"/>
+              <a:buChar char="•"/>
+            </a:pPr>
+            <a:r>
+              <a:rPr lang="en-US" sz="2000" dirty="0">
+                <a:solidFill>
+                  <a:schemeClr val="tx1"/>
+                </a:solidFill>
+              </a:rPr>
+              <a:t>The identification engine with its random-probe control</a:t>
+            </a:r>
+            <a:endParaRPr lang="en-US" sz="2000" dirty="0"/>
+          </a:p>
+        </p:txBody>
+      </p:sp>
+      <p:sp>
+        <p:nvSpPr>
+          <p:cNvPr id="11" name="Text 9"/>
+          <p:cNvSpPr txBox="1"/>
+          <p:nvPr/>
+        </p:nvSpPr>
+        <p:spPr>
+          <a:xfrm>
+            <a:off x="548640" y="5486400"/>
+            <a:ext cx="11091672" cy="548640"/>
           </a:xfrm>
           <a:prstGeom prst="rect">
             <a:avLst/>
@@ -5826,212 +6080,14 @@
               <a:buNone/>
             </a:pPr>
             <a:r>
-              <a:rPr lang="en-US" sz="2000" dirty="0">
-                <a:solidFill>
-                  <a:schemeClr val="tx2"/>
+              <a:rPr lang="en-US" sz="2400" b="1" dirty="0">
+                <a:solidFill>
+                  <a:schemeClr val="accent5"/>
                 </a:solidFill>
               </a:rPr>
-              <a:t>Only 1 of 6 directions was computed. We are not claiming three disorders were tested across studies.</a:t>
-            </a:r>
-            <a:endParaRPr lang="en-US" sz="2000" dirty="0"/>
-          </a:p>
-        </p:txBody>
-      </p:sp>
-      <p:sp>
-        <p:nvSpPr>
-          <p:cNvPr id="9" name="limitation 3"/>
-          <p:cNvSpPr/>
-          <p:nvPr/>
-        </p:nvSpPr>
-        <p:spPr>
-          <a:xfrm>
-            <a:off x="548640" y="3886200"/>
-            <a:ext cx="5349240" cy="2148840"/>
-          </a:xfrm>
-          <a:prstGeom prst="roundRect">
-            <a:avLst>
-              <a:gd name="adj" fmla="val 3404"/>
-            </a:avLst>
-          </a:prstGeom>
-          <a:solidFill>
-            <a:schemeClr val="bg2"/>
-          </a:solidFill>
-          <a:ln w="12700">
-            <a:solidFill>
-              <a:schemeClr val="bg2"/>
-            </a:solidFill>
-            <a:prstDash val="solid"/>
-          </a:ln>
-        </p:spPr>
-      </p:sp>
-      <p:sp>
-        <p:nvSpPr>
-          <p:cNvPr id="10" name="Text 8"/>
-          <p:cNvSpPr txBox="1"/>
-          <p:nvPr/>
-        </p:nvSpPr>
-        <p:spPr>
-          <a:xfrm>
-            <a:off x="868680" y="4114800"/>
-            <a:ext cx="4709160" cy="457200"/>
-          </a:xfrm>
-          <a:prstGeom prst="rect">
-            <a:avLst/>
-          </a:prstGeom>
-          <a:noFill/>
-          <a:ln/>
-        </p:spPr>
-        <p:txBody>
-          <a:bodyPr wrap="square" lIns="0" tIns="0" rIns="0" bIns="0" rtlCol="0" anchor="t"/>
-          <a:lstStyle/>
-          <a:p>
-            <a:pPr indent="0" marL="0">
-              <a:buNone/>
-            </a:pPr>
-            <a:r>
-              <a:rPr lang="en-US" sz="2400" b="1" dirty="0">
-                <a:solidFill>
-                  <a:schemeClr val="accent6"/>
-                </a:solidFill>
-              </a:rPr>
-              <a:t>Optimistic self-scores</a:t>
+              <a:t>Our claim is that this can be checked, not that the methods are new.</a:t>
             </a:r>
             <a:endParaRPr lang="en-US" sz="2400" dirty="0"/>
-          </a:p>
-        </p:txBody>
-      </p:sp>
-      <p:sp>
-        <p:nvSpPr>
-          <p:cNvPr id="11" name="Text 9"/>
-          <p:cNvSpPr txBox="1"/>
-          <p:nvPr/>
-        </p:nvSpPr>
-        <p:spPr>
-          <a:xfrm>
-            <a:off x="868680" y="4663440"/>
-            <a:ext cx="4709160" cy="1280160"/>
-          </a:xfrm>
-          <a:prstGeom prst="rect">
-            <a:avLst/>
-          </a:prstGeom>
-          <a:noFill/>
-          <a:ln/>
-        </p:spPr>
-        <p:txBody>
-          <a:bodyPr wrap="square" lIns="0" tIns="0" rIns="0" bIns="0" rtlCol="0" anchor="t"/>
-          <a:lstStyle/>
-          <a:p>
-            <a:pPr indent="0" marL="0">
-              <a:buNone/>
-            </a:pPr>
-            <a:r>
-              <a:rPr lang="en-US" sz="2000" dirty="0">
-                <a:solidFill>
-                  <a:schemeClr val="tx2"/>
-                </a:solidFill>
-              </a:rPr>
-              <a:t>Probes were chosen using all training samples, so own-disorder sensitivity is flattering.</a:t>
-            </a:r>
-            <a:endParaRPr lang="en-US" sz="2000" dirty="0"/>
-          </a:p>
-        </p:txBody>
-      </p:sp>
-      <p:sp>
-        <p:nvSpPr>
-          <p:cNvPr id="12" name="limitation 4"/>
-          <p:cNvSpPr/>
-          <p:nvPr/>
-        </p:nvSpPr>
-        <p:spPr>
-          <a:xfrm>
-            <a:off x="6172200" y="3886200"/>
-            <a:ext cx="5349240" cy="2148840"/>
-          </a:xfrm>
-          <a:prstGeom prst="roundRect">
-            <a:avLst>
-              <a:gd name="adj" fmla="val 3404"/>
-            </a:avLst>
-          </a:prstGeom>
-          <a:solidFill>
-            <a:schemeClr val="bg2"/>
-          </a:solidFill>
-          <a:ln w="12700">
-            <a:solidFill>
-              <a:schemeClr val="bg2"/>
-            </a:solidFill>
-            <a:prstDash val="solid"/>
-          </a:ln>
-        </p:spPr>
-      </p:sp>
-      <p:sp>
-        <p:nvSpPr>
-          <p:cNvPr id="13" name="Text 11"/>
-          <p:cNvSpPr txBox="1"/>
-          <p:nvPr/>
-        </p:nvSpPr>
-        <p:spPr>
-          <a:xfrm>
-            <a:off x="6492240" y="4114800"/>
-            <a:ext cx="4709160" cy="457200"/>
-          </a:xfrm>
-          <a:prstGeom prst="rect">
-            <a:avLst/>
-          </a:prstGeom>
-          <a:noFill/>
-          <a:ln/>
-        </p:spPr>
-        <p:txBody>
-          <a:bodyPr wrap="square" lIns="0" tIns="0" rIns="0" bIns="0" rtlCol="0" anchor="t"/>
-          <a:lstStyle/>
-          <a:p>
-            <a:pPr indent="0" marL="0">
-              <a:buNone/>
-            </a:pPr>
-            <a:r>
-              <a:rPr lang="en-US" sz="2400" b="1" dirty="0">
-                <a:solidFill>
-                  <a:schemeClr val="accent6"/>
-                </a:solidFill>
-              </a:rPr>
-              <a:t>Labels checked by AI only</a:t>
-            </a:r>
-            <a:endParaRPr lang="en-US" sz="2400" dirty="0"/>
-          </a:p>
-        </p:txBody>
-      </p:sp>
-      <p:sp>
-        <p:nvSpPr>
-          <p:cNvPr id="14" name="Text 12"/>
-          <p:cNvSpPr txBox="1"/>
-          <p:nvPr/>
-        </p:nvSpPr>
-        <p:spPr>
-          <a:xfrm>
-            <a:off x="6492240" y="4663440"/>
-            <a:ext cx="4709160" cy="1280160"/>
-          </a:xfrm>
-          <a:prstGeom prst="rect">
-            <a:avLst/>
-          </a:prstGeom>
-          <a:noFill/>
-          <a:ln/>
-        </p:spPr>
-        <p:txBody>
-          <a:bodyPr wrap="square" lIns="0" tIns="0" rIns="0" bIns="0" rtlCol="0" anchor="t"/>
-          <a:lstStyle/>
-          <a:p>
-            <a:pPr indent="0" marL="0">
-              <a:buNone/>
-            </a:pPr>
-            <a:r>
-              <a:rPr lang="en-US" sz="2000" dirty="0">
-                <a:solidFill>
-                  <a:schemeClr val="tx2"/>
-                </a:solidFill>
-              </a:rPr>
-              <a:t>Two AI-written rule sets agree on 81 of 81 samples. Human curation is still pending.</a:t>
-            </a:r>
-            <a:endParaRPr lang="en-US" sz="2000" dirty="0"/>
           </a:p>
         </p:txBody>
       </p:sp>
@@ -6115,8 +6171,8 @@
         </p:nvSpPr>
         <p:spPr>
           <a:xfrm>
-            <a:off x="548640" y="2011680"/>
-            <a:ext cx="11091672" cy="1737360"/>
+            <a:off x="548640" y="365760"/>
+            <a:ext cx="11091672" cy="914400"/>
           </a:xfrm>
           <a:prstGeom prst="rect">
             <a:avLst/>
@@ -6125,140 +6181,46 @@
           <a:ln/>
         </p:spPr>
         <p:txBody>
-          <a:bodyPr wrap="square" lIns="0" tIns="0" rIns="0" bIns="0" rtlCol="0" anchor="t"/>
+          <a:bodyPr wrap="square" lIns="0" tIns="0" rIns="0" bIns="0" rtlCol="0" anchor="ctr"/>
           <a:lstStyle/>
           <a:p>
             <a:pPr algn="l" indent="0" marL="0">
               <a:buNone/>
             </a:pPr>
             <a:r>
-              <a:rPr lang="en-US" sz="4400" b="1" dirty="0">
-                <a:solidFill>
-                  <a:schemeClr val="bg1"/>
+              <a:rPr lang="en-US" sz="3600" b="1" dirty="0">
+                <a:solidFill>
+                  <a:schemeClr val="tx1"/>
                 </a:solidFill>
               </a:rPr>
-              <a:t>Public data support far less than within-study numbers suggest</a:t>
-            </a:r>
-            <a:endParaRPr lang="en-US" sz="4400" dirty="0"/>
-          </a:p>
-        </p:txBody>
-      </p:sp>
-      <p:sp>
-        <p:nvSpPr>
-          <p:cNvPr id="3" name="Text 1"/>
-          <p:cNvSpPr txBox="1"/>
-          <p:nvPr/>
-        </p:nvSpPr>
-        <p:spPr>
-          <a:xfrm>
-            <a:off x="548640" y="3429000"/>
-            <a:ext cx="11091672" cy="2057400"/>
-          </a:xfrm>
-          <a:prstGeom prst="rect">
-            <a:avLst/>
-          </a:prstGeom>
-          <a:noFill/>
-          <a:ln/>
-        </p:spPr>
-        <p:txBody>
-          <a:bodyPr wrap="square" lIns="0" tIns="0" rIns="0" bIns="0" rtlCol="0" anchor="t"/>
-          <a:lstStyle/>
-          <a:p>
-            <a:pPr marL="342900" indent="-342900">
-              <a:spcAft>
-                <a:spcPts val="600"/>
-              </a:spcAft>
-              <a:buSzPct val="100000"/>
-              <a:buChar char="•"/>
-            </a:pPr>
-            <a:r>
-              <a:rPr lang="en-US" sz="2000" dirty="0">
-                <a:solidFill>
-                  <a:schemeClr val="bg1"/>
-                </a:solidFill>
-              </a:rPr>
-              <a:t>1 of 6 cross-study tests could be run; 2 of 3 eligible disorders were never tested across studies</a:t>
-            </a:r>
-            <a:endParaRPr lang="en-US" sz="2000" dirty="0"/>
-          </a:p>
-          <a:p>
-            <a:pPr marL="342900" indent="-342900">
-              <a:spcAft>
-                <a:spcPts val="600"/>
-              </a:spcAft>
-              <a:buSzPct val="100000"/>
-              <a:buChar char="•"/>
-            </a:pPr>
-            <a:r>
-              <a:rPr lang="en-US" sz="2000" dirty="0">
-                <a:solidFill>
-                  <a:schemeClr val="bg1"/>
-                </a:solidFill>
-              </a:rPr>
-              <a:t>Borrowed controls: 68.1% false positives on other disorders, against 11.9%</a:t>
-            </a:r>
-            <a:endParaRPr lang="en-US" sz="2000" dirty="0"/>
-          </a:p>
-          <a:p>
-            <a:pPr marL="342900" indent="-342900">
-              <a:spcAft>
-                <a:spcPts val="600"/>
-              </a:spcAft>
-              <a:buSzPct val="100000"/>
-              <a:buChar char="•"/>
-            </a:pPr>
-            <a:r>
-              <a:rPr lang="en-US" sz="2000" dirty="0">
-                <a:solidFill>
-                  <a:schemeClr val="bg1"/>
-                </a:solidFill>
-              </a:rPr>
-              <a:t>2 disorders have a between-study bound; both read "No evidence"</a:t>
-            </a:r>
-            <a:endParaRPr lang="en-US" sz="2000" dirty="0"/>
-          </a:p>
-          <a:p>
-            <a:pPr marL="342900" indent="-342900">
-              <a:spcAft>
-                <a:spcPts val="600"/>
-              </a:spcAft>
-              <a:buSzPct val="100000"/>
-              <a:buChar char="•"/>
-            </a:pPr>
-            <a:r>
-              <a:rPr lang="en-US" sz="2000" dirty="0">
-                <a:solidFill>
-                  <a:schemeClr val="bg1"/>
-                </a:solidFill>
-              </a:rPr>
-              <a:t>What the field needs: the same disorder from more than one site, with each site's own controls</a:t>
-            </a:r>
-            <a:endParaRPr lang="en-US" sz="2000" dirty="0"/>
-          </a:p>
-        </p:txBody>
-      </p:sp>
-      <p:sp>
-        <p:nvSpPr>
-          <p:cNvPr id="4" name="command panel"/>
+              <a:t>Limitations, before you ask</a:t>
+            </a:r>
+            <a:endParaRPr lang="en-US" sz="3600" dirty="0"/>
+          </a:p>
+        </p:txBody>
+      </p:sp>
+      <p:sp>
+        <p:nvSpPr>
+          <p:cNvPr id="3" name="limitation 1"/>
           <p:cNvSpPr/>
           <p:nvPr/>
         </p:nvSpPr>
         <p:spPr>
           <a:xfrm>
-            <a:off x="548640" y="5577840"/>
-            <a:ext cx="11091672" cy="777240"/>
+            <a:off x="548640" y="1508760"/>
+            <a:ext cx="5349240" cy="2148840"/>
           </a:xfrm>
           <a:prstGeom prst="roundRect">
             <a:avLst>
-              <a:gd name="adj" fmla="val 9412"/>
+              <a:gd name="adj" fmla="val 3404"/>
             </a:avLst>
           </a:prstGeom>
           <a:solidFill>
-            <a:schemeClr val="tx2"/>
+            <a:schemeClr val="bg2"/>
           </a:solidFill>
           <a:ln w="12700">
             <a:solidFill>
-              <a:schemeClr val="tx2"/>
+              <a:schemeClr val="bg2"/>
             </a:solidFill>
             <a:prstDash val="solid"/>
           </a:ln>
@@ -6266,14 +6228,14 @@
       </p:sp>
       <p:sp>
         <p:nvSpPr>
-          <p:cNvPr id="5" name="Text 3"/>
+          <p:cNvPr id="4" name="Text 2"/>
           <p:cNvSpPr txBox="1"/>
           <p:nvPr/>
         </p:nvSpPr>
         <p:spPr>
           <a:xfrm>
-            <a:off x="822960" y="5577840"/>
-            <a:ext cx="10543032" cy="777240"/>
+            <a:off x="868680" y="1737360"/>
+            <a:ext cx="4709160" cy="457200"/>
           </a:xfrm>
           <a:prstGeom prst="rect">
             <a:avLst/>
@@ -6282,25 +6244,44 @@
           <a:ln/>
         </p:spPr>
         <p:txBody>
-          <a:bodyPr wrap="square" lIns="0" tIns="0" rIns="0" bIns="0" rtlCol="0" anchor="ctr"/>
+          <a:bodyPr wrap="square" lIns="0" tIns="0" rIns="0" bIns="0" rtlCol="0" anchor="t"/>
           <a:lstStyle/>
           <a:p>
             <a:pPr indent="0" marL="0">
               <a:buNone/>
             </a:pPr>
             <a:r>
-              <a:rPr lang="en-US" sz="2000" dirty="0">
-                <a:solidFill>
-                  <a:schemeClr val="bg1"/>
-                </a:solidFill>
-                <a:latin typeface="Courier New" pitchFamily="34" charset="0"/>
-                <a:ea typeface="Courier New" pitchFamily="34" charset="-122"/>
-                <a:cs typeface="Courier New" pitchFamily="34" charset="-120"/>
+              <a:rPr lang="en-US" sz="2400" b="1" dirty="0">
+                <a:solidFill>
+                  <a:schemeClr val="accent6"/>
+                </a:solidFill>
               </a:rPr>
-              <a:t>python scripts/reproduce.py</a:t>
-            </a:r>
-            <a:endParaRPr lang="en-US" sz="2000" dirty="0"/>
-          </a:p>
+              <a:t>Small numbers</a:t>
+            </a:r>
+            <a:endParaRPr lang="en-US" sz="2400" dirty="0"/>
+          </a:p>
+        </p:txBody>
+      </p:sp>
+      <p:sp>
+        <p:nvSpPr>
+          <p:cNvPr id="5" name="Text 3"/>
+          <p:cNvSpPr txBox="1"/>
+          <p:nvPr/>
+        </p:nvSpPr>
+        <p:spPr>
+          <a:xfrm>
+            <a:off x="868680" y="2286000"/>
+            <a:ext cx="4709160" cy="1280160"/>
+          </a:xfrm>
+          <a:prstGeom prst="rect">
+            <a:avLst/>
+          </a:prstGeom>
+          <a:noFill/>
+          <a:ln/>
+        </p:spPr>
+        <p:txBody>
+          <a:bodyPr wrap="square" lIns="0" tIns="0" rIns="0" bIns="0" rtlCol="0" anchor="t"/>
+          <a:lstStyle/>
           <a:p>
             <a:pPr indent="0" marL="0">
               <a:buNone/>
@@ -6308,15 +6289,354 @@
             <a:r>
               <a:rPr lang="en-US" sz="2000" dirty="0">
                 <a:solidFill>
-                  <a:schemeClr val="bg1"/>
-                </a:solidFill>
-                <a:latin typeface="Courier New" pitchFamily="34" charset="0"/>
-                <a:ea typeface="Courier New" pitchFamily="34" charset="-122"/>
-                <a:cs typeface="Courier New" pitchFamily="34" charset="-120"/>
+                  <a:schemeClr val="tx2"/>
+                </a:solidFill>
               </a:rPr>
-              <a:t>github.com/cleverlyblue0009/EpiGrade</a:t>
+              <a:t>That one cross-study result rests on 18 cases and 6 controls.</a:t>
             </a:r>
             <a:endParaRPr lang="en-US" sz="2000" dirty="0"/>
+          </a:p>
+        </p:txBody>
+      </p:sp>
+      <p:sp>
+        <p:nvSpPr>
+          <p:cNvPr id="6" name="limitation 2"/>
+          <p:cNvSpPr/>
+          <p:nvPr/>
+        </p:nvSpPr>
+        <p:spPr>
+          <a:xfrm>
+            <a:off x="6172200" y="1508760"/>
+            <a:ext cx="5349240" cy="2148840"/>
+          </a:xfrm>
+          <a:prstGeom prst="roundRect">
+            <a:avLst>
+              <a:gd name="adj" fmla="val 3404"/>
+            </a:avLst>
+          </a:prstGeom>
+          <a:solidFill>
+            <a:schemeClr val="bg2"/>
+          </a:solidFill>
+          <a:ln w="12700">
+            <a:solidFill>
+              <a:schemeClr val="bg2"/>
+            </a:solidFill>
+            <a:prstDash val="solid"/>
+          </a:ln>
+        </p:spPr>
+      </p:sp>
+      <p:sp>
+        <p:nvSpPr>
+          <p:cNvPr id="7" name="Text 5"/>
+          <p:cNvSpPr txBox="1"/>
+          <p:nvPr/>
+        </p:nvSpPr>
+        <p:spPr>
+          <a:xfrm>
+            <a:off x="6492240" y="1737360"/>
+            <a:ext cx="4709160" cy="457200"/>
+          </a:xfrm>
+          <a:prstGeom prst="rect">
+            <a:avLst/>
+          </a:prstGeom>
+          <a:noFill/>
+          <a:ln/>
+        </p:spPr>
+        <p:txBody>
+          <a:bodyPr wrap="square" lIns="0" tIns="0" rIns="0" bIns="0" rtlCol="0" anchor="t"/>
+          <a:lstStyle/>
+          <a:p>
+            <a:pPr indent="0" marL="0">
+              <a:buNone/>
+            </a:pPr>
+            <a:r>
+              <a:rPr lang="en-US" sz="2400" b="1" dirty="0">
+                <a:solidFill>
+                  <a:schemeClr val="accent6"/>
+                </a:solidFill>
+              </a:rPr>
+              <a:t>One cross-study test</a:t>
+            </a:r>
+            <a:endParaRPr lang="en-US" sz="2400" dirty="0"/>
+          </a:p>
+        </p:txBody>
+      </p:sp>
+      <p:sp>
+        <p:nvSpPr>
+          <p:cNvPr id="8" name="Text 6"/>
+          <p:cNvSpPr txBox="1"/>
+          <p:nvPr/>
+        </p:nvSpPr>
+        <p:spPr>
+          <a:xfrm>
+            <a:off x="6492240" y="2286000"/>
+            <a:ext cx="4709160" cy="1280160"/>
+          </a:xfrm>
+          <a:prstGeom prst="rect">
+            <a:avLst/>
+          </a:prstGeom>
+          <a:noFill/>
+          <a:ln/>
+        </p:spPr>
+        <p:txBody>
+          <a:bodyPr wrap="square" lIns="0" tIns="0" rIns="0" bIns="0" rtlCol="0" anchor="t"/>
+          <a:lstStyle/>
+          <a:p>
+            <a:pPr indent="0" marL="0">
+              <a:buNone/>
+            </a:pPr>
+            <a:r>
+              <a:rPr lang="en-US" sz="2000" dirty="0">
+                <a:solidFill>
+                  <a:schemeClr val="tx2"/>
+                </a:solidFill>
+              </a:rPr>
+              <a:t>Only 1 of 6 directions was computed. We are not claiming three disorders were tested across studies.</a:t>
+            </a:r>
+            <a:endParaRPr lang="en-US" sz="2000" dirty="0"/>
+          </a:p>
+        </p:txBody>
+      </p:sp>
+      <p:sp>
+        <p:nvSpPr>
+          <p:cNvPr id="9" name="limitation 3"/>
+          <p:cNvSpPr/>
+          <p:nvPr/>
+        </p:nvSpPr>
+        <p:spPr>
+          <a:xfrm>
+            <a:off x="548640" y="3886200"/>
+            <a:ext cx="5349240" cy="2148840"/>
+          </a:xfrm>
+          <a:prstGeom prst="roundRect">
+            <a:avLst>
+              <a:gd name="adj" fmla="val 3404"/>
+            </a:avLst>
+          </a:prstGeom>
+          <a:solidFill>
+            <a:schemeClr val="bg2"/>
+          </a:solidFill>
+          <a:ln w="12700">
+            <a:solidFill>
+              <a:schemeClr val="bg2"/>
+            </a:solidFill>
+            <a:prstDash val="solid"/>
+          </a:ln>
+        </p:spPr>
+      </p:sp>
+      <p:sp>
+        <p:nvSpPr>
+          <p:cNvPr id="10" name="Text 8"/>
+          <p:cNvSpPr txBox="1"/>
+          <p:nvPr/>
+        </p:nvSpPr>
+        <p:spPr>
+          <a:xfrm>
+            <a:off x="868680" y="4114800"/>
+            <a:ext cx="4709160" cy="457200"/>
+          </a:xfrm>
+          <a:prstGeom prst="rect">
+            <a:avLst/>
+          </a:prstGeom>
+          <a:noFill/>
+          <a:ln/>
+        </p:spPr>
+        <p:txBody>
+          <a:bodyPr wrap="square" lIns="0" tIns="0" rIns="0" bIns="0" rtlCol="0" anchor="t"/>
+          <a:lstStyle/>
+          <a:p>
+            <a:pPr indent="0" marL="0">
+              <a:buNone/>
+            </a:pPr>
+            <a:r>
+              <a:rPr lang="en-US" sz="2400" b="1" dirty="0">
+                <a:solidFill>
+                  <a:schemeClr val="accent6"/>
+                </a:solidFill>
+              </a:rPr>
+              <a:t>Optimistic self-scores</a:t>
+            </a:r>
+            <a:endParaRPr lang="en-US" sz="2400" dirty="0"/>
+          </a:p>
+        </p:txBody>
+      </p:sp>
+      <p:sp>
+        <p:nvSpPr>
+          <p:cNvPr id="11" name="Text 9"/>
+          <p:cNvSpPr txBox="1"/>
+          <p:nvPr/>
+        </p:nvSpPr>
+        <p:spPr>
+          <a:xfrm>
+            <a:off x="868680" y="4663440"/>
+            <a:ext cx="4709160" cy="1280160"/>
+          </a:xfrm>
+          <a:prstGeom prst="rect">
+            <a:avLst/>
+          </a:prstGeom>
+          <a:noFill/>
+          <a:ln/>
+        </p:spPr>
+        <p:txBody>
+          <a:bodyPr wrap="square" lIns="0" tIns="0" rIns="0" bIns="0" rtlCol="0" anchor="t"/>
+          <a:lstStyle/>
+          <a:p>
+            <a:pPr indent="0" marL="0">
+              <a:buNone/>
+            </a:pPr>
+            <a:r>
+              <a:rPr lang="en-US" sz="2000" dirty="0">
+                <a:solidFill>
+                  <a:schemeClr val="tx2"/>
+                </a:solidFill>
+              </a:rPr>
+              <a:t>Probes were chosen using all training samples, so own-disorder sensitivity is flattering.</a:t>
+            </a:r>
+            <a:endParaRPr lang="en-US" sz="2000" dirty="0"/>
+          </a:p>
+        </p:txBody>
+      </p:sp>
+      <p:sp>
+        <p:nvSpPr>
+          <p:cNvPr id="12" name="limitation 4"/>
+          <p:cNvSpPr/>
+          <p:nvPr/>
+        </p:nvSpPr>
+        <p:spPr>
+          <a:xfrm>
+            <a:off x="6172200" y="3886200"/>
+            <a:ext cx="5349240" cy="2148840"/>
+          </a:xfrm>
+          <a:prstGeom prst="roundRect">
+            <a:avLst>
+              <a:gd name="adj" fmla="val 3404"/>
+            </a:avLst>
+          </a:prstGeom>
+          <a:solidFill>
+            <a:schemeClr val="bg2"/>
+          </a:solidFill>
+          <a:ln w="12700">
+            <a:solidFill>
+              <a:schemeClr val="bg2"/>
+            </a:solidFill>
+            <a:prstDash val="solid"/>
+          </a:ln>
+        </p:spPr>
+      </p:sp>
+      <p:sp>
+        <p:nvSpPr>
+          <p:cNvPr id="13" name="Text 11"/>
+          <p:cNvSpPr txBox="1"/>
+          <p:nvPr/>
+        </p:nvSpPr>
+        <p:spPr>
+          <a:xfrm>
+            <a:off x="6492240" y="4114800"/>
+            <a:ext cx="4709160" cy="457200"/>
+          </a:xfrm>
+          <a:prstGeom prst="rect">
+            <a:avLst/>
+          </a:prstGeom>
+          <a:noFill/>
+          <a:ln/>
+        </p:spPr>
+        <p:txBody>
+          <a:bodyPr wrap="square" lIns="0" tIns="0" rIns="0" bIns="0" rtlCol="0" anchor="t"/>
+          <a:lstStyle/>
+          <a:p>
+            <a:pPr indent="0" marL="0">
+              <a:buNone/>
+            </a:pPr>
+            <a:r>
+              <a:rPr lang="en-US" sz="2400" b="1" dirty="0">
+                <a:solidFill>
+                  <a:schemeClr val="accent6"/>
+                </a:solidFill>
+              </a:rPr>
+              <a:t>Labels checked by AI only</a:t>
+            </a:r>
+            <a:endParaRPr lang="en-US" sz="2400" dirty="0"/>
+          </a:p>
+        </p:txBody>
+      </p:sp>
+      <p:sp>
+        <p:nvSpPr>
+          <p:cNvPr id="14" name="Text 12"/>
+          <p:cNvSpPr txBox="1"/>
+          <p:nvPr/>
+        </p:nvSpPr>
+        <p:spPr>
+          <a:xfrm>
+            <a:off x="6492240" y="4663440"/>
+            <a:ext cx="4709160" cy="1280160"/>
+          </a:xfrm>
+          <a:prstGeom prst="rect">
+            <a:avLst/>
+          </a:prstGeom>
+          <a:noFill/>
+          <a:ln/>
+        </p:spPr>
+        <p:txBody>
+          <a:bodyPr wrap="square" lIns="0" tIns="0" rIns="0" bIns="0" rtlCol="0" anchor="t"/>
+          <a:lstStyle/>
+          <a:p>
+            <a:pPr indent="0" marL="0">
+              <a:buNone/>
+            </a:pPr>
+            <a:r>
+              <a:rPr lang="en-US" sz="2000" dirty="0">
+                <a:solidFill>
+                  <a:schemeClr val="tx2"/>
+                </a:solidFill>
+              </a:rPr>
+              <a:t>Two AI-written rule sets agree on 81 of 81 samples. Human curation is still pending.</a:t>
+            </a:r>
+            <a:endParaRPr lang="en-US" sz="2000" dirty="0"/>
+          </a:p>
+        </p:txBody>
+      </p:sp>
+      <p:sp>
+        <p:nvSpPr>
+          <p:cNvPr id="25" name="Slide Number Placeholder 0"/>
+          <p:cNvSpPr>
+            <a:spLocks noGrp="1"/>
+          </p:cNvSpPr>
+          <p:nvPr>
+            <p:ph type="sldNum" sz="quarter" idx="4294967295"/>
+          </p:nvPr>
+        </p:nvSpPr>
+        <p:spPr>
+          <a:xfrm>
+            <a:off x="11274552" y="6400800"/>
+            <a:ext cx="457200" cy="274320"/>
+          </a:xfrm>
+          <a:prstGeom prst="rect">
+            <a:avLst/>
+          </a:prstGeom>
+          <a:extLst>
+            <a:ext uri="{C572A759-6A51-4108-AA02-DFA0A04FC94B}">
+              <ma14:wrappingTextBoxFlag xmlns:ma14="http://schemas.microsoft.com/office/mac/drawingml/2011/main" val="0"/>
+            </a:ext>
+          </a:extLst>
+        </p:spPr>
+        <p:txBody>
+          <a:bodyPr/>
+          <a:lstStyle>
+            <a:lvl1pPr>
+              <a:defRPr sz="1200">
+                <a:solidFill>
+                  <a:srgbClr val="8A8984"/>
+                </a:solidFill>
+              </a:defRPr>
+            </a:lvl1pPr>
+          </a:lstStyle>
+          <a:p>
+            <a:pPr algn="l"/>
+            <a:fld id="{F7021451-1387-4CA6-816F-3879F97B5CBC}" type="slidenum">
+              <a:rPr b="0" lang="en-US"/>
+              <a:t>16</a:t>
+            </a:fld>
+            <a:endParaRPr lang="en-US"/>
           </a:p>
         </p:txBody>
       </p:sp>
@@ -6355,8 +6675,8 @@
         </p:nvSpPr>
         <p:spPr>
           <a:xfrm>
-            <a:off x="548640" y="365760"/>
-            <a:ext cx="11091672" cy="914400"/>
+            <a:off x="548640" y="2011680"/>
+            <a:ext cx="11091672" cy="1737360"/>
           </a:xfrm>
           <a:prstGeom prst="rect">
             <a:avLst/>
@@ -6365,13 +6685,253 @@
           <a:ln/>
         </p:spPr>
         <p:txBody>
-          <a:bodyPr wrap="square" lIns="0" tIns="0" rIns="0" bIns="0" rtlCol="0" anchor="ctr"/>
+          <a:bodyPr wrap="square" lIns="0" tIns="0" rIns="0" bIns="0" rtlCol="0" anchor="t"/>
           <a:lstStyle/>
           <a:p>
             <a:pPr algn="l" indent="0" marL="0">
               <a:buNone/>
             </a:pPr>
             <a:r>
+              <a:rPr lang="en-US" sz="4400" b="1" dirty="0">
+                <a:solidFill>
+                  <a:schemeClr val="bg1"/>
+                </a:solidFill>
+              </a:rPr>
+              <a:t>Public data support far less than within-study numbers suggest</a:t>
+            </a:r>
+            <a:endParaRPr lang="en-US" sz="4400" dirty="0"/>
+          </a:p>
+        </p:txBody>
+      </p:sp>
+      <p:sp>
+        <p:nvSpPr>
+          <p:cNvPr id="3" name="Text 1"/>
+          <p:cNvSpPr txBox="1"/>
+          <p:nvPr/>
+        </p:nvSpPr>
+        <p:spPr>
+          <a:xfrm>
+            <a:off x="548640" y="3429000"/>
+            <a:ext cx="11091672" cy="2057400"/>
+          </a:xfrm>
+          <a:prstGeom prst="rect">
+            <a:avLst/>
+          </a:prstGeom>
+          <a:noFill/>
+          <a:ln/>
+        </p:spPr>
+        <p:txBody>
+          <a:bodyPr wrap="square" lIns="0" tIns="0" rIns="0" bIns="0" rtlCol="0" anchor="t"/>
+          <a:lstStyle/>
+          <a:p>
+            <a:pPr marL="342900" indent="-342900">
+              <a:spcAft>
+                <a:spcPts val="600"/>
+              </a:spcAft>
+              <a:buSzPct val="100000"/>
+              <a:buChar char="•"/>
+            </a:pPr>
+            <a:r>
+              <a:rPr lang="en-US" sz="2000" dirty="0">
+                <a:solidFill>
+                  <a:schemeClr val="bg1"/>
+                </a:solidFill>
+              </a:rPr>
+              <a:t>1 of 6 cross-study tests could be run; 2 of 3 eligible disorders were never tested across studies</a:t>
+            </a:r>
+            <a:endParaRPr lang="en-US" sz="2000" dirty="0"/>
+          </a:p>
+          <a:p>
+            <a:pPr marL="342900" indent="-342900">
+              <a:spcAft>
+                <a:spcPts val="600"/>
+              </a:spcAft>
+              <a:buSzPct val="100000"/>
+              <a:buChar char="•"/>
+            </a:pPr>
+            <a:r>
+              <a:rPr lang="en-US" sz="2000" dirty="0">
+                <a:solidFill>
+                  <a:schemeClr val="bg1"/>
+                </a:solidFill>
+              </a:rPr>
+              <a:t>Borrowed controls: 68.1% false positives on other disorders, against 11.9%</a:t>
+            </a:r>
+            <a:endParaRPr lang="en-US" sz="2000" dirty="0"/>
+          </a:p>
+          <a:p>
+            <a:pPr marL="342900" indent="-342900">
+              <a:spcAft>
+                <a:spcPts val="600"/>
+              </a:spcAft>
+              <a:buSzPct val="100000"/>
+              <a:buChar char="•"/>
+            </a:pPr>
+            <a:r>
+              <a:rPr lang="en-US" sz="2000" dirty="0">
+                <a:solidFill>
+                  <a:schemeClr val="bg1"/>
+                </a:solidFill>
+              </a:rPr>
+              <a:t>2 disorders have a between-study bound; both read "No evidence"</a:t>
+            </a:r>
+            <a:endParaRPr lang="en-US" sz="2000" dirty="0"/>
+          </a:p>
+          <a:p>
+            <a:pPr marL="342900" indent="-342900">
+              <a:spcAft>
+                <a:spcPts val="600"/>
+              </a:spcAft>
+              <a:buSzPct val="100000"/>
+              <a:buChar char="•"/>
+            </a:pPr>
+            <a:r>
+              <a:rPr lang="en-US" sz="2000" dirty="0">
+                <a:solidFill>
+                  <a:schemeClr val="bg1"/>
+                </a:solidFill>
+              </a:rPr>
+              <a:t>What the field needs: the same disorder from more than one site, with each site's own controls</a:t>
+            </a:r>
+            <a:endParaRPr lang="en-US" sz="2000" dirty="0"/>
+          </a:p>
+        </p:txBody>
+      </p:sp>
+      <p:sp>
+        <p:nvSpPr>
+          <p:cNvPr id="4" name="command panel"/>
+          <p:cNvSpPr/>
+          <p:nvPr/>
+        </p:nvSpPr>
+        <p:spPr>
+          <a:xfrm>
+            <a:off x="548640" y="5577840"/>
+            <a:ext cx="11091672" cy="777240"/>
+          </a:xfrm>
+          <a:prstGeom prst="roundRect">
+            <a:avLst>
+              <a:gd name="adj" fmla="val 9412"/>
+            </a:avLst>
+          </a:prstGeom>
+          <a:solidFill>
+            <a:schemeClr val="tx2"/>
+          </a:solidFill>
+          <a:ln w="12700">
+            <a:solidFill>
+              <a:schemeClr val="tx2"/>
+            </a:solidFill>
+            <a:prstDash val="solid"/>
+          </a:ln>
+        </p:spPr>
+      </p:sp>
+      <p:sp>
+        <p:nvSpPr>
+          <p:cNvPr id="5" name="Text 3"/>
+          <p:cNvSpPr txBox="1"/>
+          <p:nvPr/>
+        </p:nvSpPr>
+        <p:spPr>
+          <a:xfrm>
+            <a:off x="822960" y="5577840"/>
+            <a:ext cx="10543032" cy="777240"/>
+          </a:xfrm>
+          <a:prstGeom prst="rect">
+            <a:avLst/>
+          </a:prstGeom>
+          <a:noFill/>
+          <a:ln/>
+        </p:spPr>
+        <p:txBody>
+          <a:bodyPr wrap="square" lIns="0" tIns="0" rIns="0" bIns="0" rtlCol="0" anchor="ctr"/>
+          <a:lstStyle/>
+          <a:p>
+            <a:pPr indent="0" marL="0">
+              <a:buNone/>
+            </a:pPr>
+            <a:r>
+              <a:rPr lang="en-US" sz="2000" dirty="0">
+                <a:solidFill>
+                  <a:schemeClr val="bg1"/>
+                </a:solidFill>
+                <a:latin typeface="Courier New" pitchFamily="34" charset="0"/>
+                <a:ea typeface="Courier New" pitchFamily="34" charset="-122"/>
+                <a:cs typeface="Courier New" pitchFamily="34" charset="-120"/>
+              </a:rPr>
+              <a:t>python scripts/reproduce.py</a:t>
+            </a:r>
+            <a:endParaRPr lang="en-US" sz="2000" dirty="0"/>
+          </a:p>
+          <a:p>
+            <a:pPr indent="0" marL="0">
+              <a:buNone/>
+            </a:pPr>
+            <a:r>
+              <a:rPr lang="en-US" sz="2000" dirty="0">
+                <a:solidFill>
+                  <a:schemeClr val="bg1"/>
+                </a:solidFill>
+                <a:latin typeface="Courier New" pitchFamily="34" charset="0"/>
+                <a:ea typeface="Courier New" pitchFamily="34" charset="-122"/>
+                <a:cs typeface="Courier New" pitchFamily="34" charset="-120"/>
+              </a:rPr>
+              <a:t>github.com/cleverlyblue0009/EpiGrade</a:t>
+            </a:r>
+            <a:endParaRPr lang="en-US" sz="2000" dirty="0"/>
+          </a:p>
+        </p:txBody>
+      </p:sp>
+    </p:spTree>
+  </p:cSld>
+  <p:clrMapOvr>
+    <a:masterClrMapping/>
+  </p:clrMapOvr>
+</p:sld>
+</file>
+
+<file path=ppt/slides/slide18.xml><?xml version="1.0" encoding="utf-8"?>
+<p:sld xmlns:a="http://schemas.openxmlformats.org/drawingml/2006/main" xmlns:r="http://schemas.openxmlformats.org/officeDocument/2006/relationships" xmlns:p="http://schemas.openxmlformats.org/presentationml/2006/main">
+  <p:cSld name="Slide 18">
+    <p:spTree>
+      <p:nvGrpSpPr>
+        <p:cNvPr id="1" name=""/>
+        <p:cNvGrpSpPr/>
+        <p:nvPr/>
+      </p:nvGrpSpPr>
+      <p:grpSpPr>
+        <a:xfrm>
+          <a:off x="0" y="0"/>
+          <a:ext cx="0" cy="0"/>
+          <a:chOff x="0" y="0"/>
+          <a:chExt cx="0" cy="0"/>
+        </a:xfrm>
+      </p:grpSpPr>
+      <p:sp>
+        <p:nvSpPr>
+          <p:cNvPr id="2" name="Text 0"/>
+          <p:cNvSpPr/>
+          <p:nvPr>
+            <p:ph idx="100" type="title" hasCustomPrompt="1"/>
+          </p:nvPr>
+        </p:nvSpPr>
+        <p:spPr>
+          <a:xfrm>
+            <a:off x="548640" y="365760"/>
+            <a:ext cx="11091672" cy="914400"/>
+          </a:xfrm>
+          <a:prstGeom prst="rect">
+            <a:avLst/>
+          </a:prstGeom>
+          <a:noFill/>
+          <a:ln/>
+        </p:spPr>
+        <p:txBody>
+          <a:bodyPr wrap="square" lIns="0" tIns="0" rIns="0" bIns="0" rtlCol="0" anchor="ctr"/>
+          <a:lstStyle/>
+          <a:p>
+            <a:pPr algn="l" indent="0" marL="0">
+              <a:buNone/>
+            </a:pPr>
+            <a:r>
               <a:rPr lang="en-US" sz="3600" b="1" dirty="0">
                 <a:solidFill>
                   <a:schemeClr val="tx1"/>
@@ -6385,7 +6945,7 @@
       </p:sp>
       <p:graphicFrame>
         <p:nvGraphicFramePr>
-          <p:cNvPr id="18" name="methods table"/>
+          <p:cNvPr id="19" name="methods table"/>
           <p:cNvGraphicFramePr>
             <a:graphicFrameLocks noGrp="1"/>
           </p:cNvGraphicFramePr>
@@ -7320,7 +7880,7 @@
             <a:pPr algn="l"/>
             <a:fld id="{F7021451-1387-4CA6-816F-3879F97B5CBC}" type="slidenum">
               <a:rPr b="0" lang="en-US"/>
-              <a:t>17</a:t>
+              <a:t>18</a:t>
             </a:fld>
             <a:endParaRPr lang="en-US"/>
           </a:p>
